--- a/MediTalk_Presentation.pptx
+++ b/MediTalk_Presentation.pptx
@@ -4,6 +4,9 @@
   <p:sldMasterIdLst>
     <p:sldMasterId id="2147483648" r:id="rId1"/>
   </p:sldMasterIdLst>
+  <p:notesMasterIdLst>
+    <p:notesMasterId r:id="rId12"/>
+  </p:notesMasterIdLst>
   <p:sldIdLst>
     <p:sldId id="256" r:id="rId2"/>
     <p:sldId id="257" r:id="rId3"/>
@@ -16,10 +19,7 @@
     <p:sldId id="264" r:id="rId10"/>
     <p:sldId id="265" r:id="rId11"/>
   </p:sldIdLst>
-  <p:notesMasterIdLst>
-    <p:notesMasterId r:id="rId12"/>
-  </p:notesMasterIdLst>
-  <p:sldSz cx="9144000" cy="5143500"/>
+  <p:sldSz cx="9144000" cy="5143500" type="screen16x9"/>
   <p:notesSz cx="5143500" cy="9144000"/>
   <p:defaultTextStyle>
     <a:lvl1pPr marL="0" algn="l" defTabSz="914400" rtl="0" eaLnBrk="1" latinLnBrk="0" hangingPunct="1">
@@ -113,6 +113,11 @@
       </a:defRPr>
     </a:lvl9pPr>
   </p:defaultTextStyle>
+  <p:extLst>
+    <p:ext uri="{EFAFB233-063F-42B5-8137-9DF3F51BA10A}">
+      <p15:sldGuideLst xmlns:p15="http://schemas.microsoft.com/office/powerpoint/2012/main"/>
+    </p:ext>
+  </p:extLst>
 </p:presentation>
 </file>
 
@@ -138,234 +143,10 @@
           <a:chExt cx="0" cy="0"/>
         </a:xfrm>
       </p:grpSpPr>
-      <p:sp>
-        <p:nvSpPr>
-          <p:cNvPr id="2" name="Header Placeholder 1"/>
-          <p:cNvSpPr>
-            <a:spLocks noGrp="1"/>
-          </p:cNvSpPr>
-          <p:nvPr>
-            <p:ph type="hdr" sz="quarter"/>
-          </p:nvPr>
-        </p:nvSpPr>
-        <p:spPr>
-          <a:xfrm>
-            <a:off x="0" y="0"/>
-            <a:ext cx="2971800" cy="458788"/>
-          </a:xfrm>
-          <a:prstGeom prst="rect">
-            <a:avLst/>
-          </a:prstGeom>
-        </p:spPr>
-        <p:txBody>
-          <a:bodyPr vert="horz" lIns="91440" tIns="45720" rIns="91440" bIns="45720" rtlCol="0"/>
-          <a:lstStyle>
-            <a:lvl1pPr algn="l">
-              <a:defRPr sz="1200"/>
-            </a:lvl1pPr>
-          </a:lstStyle>
-          <a:p>
-            <a:endParaRPr lang="en-US"/>
-          </a:p>
-        </p:txBody>
-      </p:sp>
-      <p:sp>
-        <p:nvSpPr>
-          <p:cNvPr id="3" name="Date Placeholder 2"/>
-          <p:cNvSpPr>
-            <a:spLocks noGrp="1"/>
-          </p:cNvSpPr>
-          <p:nvPr>
-            <p:ph type="dt" idx="1"/>
-          </p:nvPr>
-        </p:nvSpPr>
-        <p:spPr>
-          <a:xfrm>
-            <a:off x="3884613" y="0"/>
-            <a:ext cx="2971800" cy="458788"/>
-          </a:xfrm>
-          <a:prstGeom prst="rect">
-            <a:avLst/>
-          </a:prstGeom>
-        </p:spPr>
-        <p:txBody>
-          <a:bodyPr vert="horz" lIns="91440" tIns="45720" rIns="91440" bIns="45720" rtlCol="0"/>
-          <a:lstStyle>
-            <a:lvl1pPr algn="r">
-              <a:defRPr sz="1200"/>
-            </a:lvl1pPr>
-          </a:lstStyle>
-          <a:p>
-            <a:fld id="{5282F153-3F37-0F45-9E97-73ACFA13230C}" type="datetimeFigureOut">
-              <a:rPr lang="en-US"/>
-              <a:t>7/23/19</a:t>
-            </a:fld>
-            <a:endParaRPr lang="en-US"/>
-          </a:p>
-        </p:txBody>
-      </p:sp>
-      <p:sp>
-        <p:nvSpPr>
-          <p:cNvPr id="4" name="Slide Image Placeholder 3"/>
-          <p:cNvSpPr>
-            <a:spLocks noGrp="1" noRot="1" noChangeAspect="1"/>
-          </p:cNvSpPr>
-          <p:nvPr>
-            <p:ph type="sldImg" idx="2"/>
-          </p:nvPr>
-        </p:nvSpPr>
-        <p:spPr>
-          <a:xfrm>
-            <a:off x="685800" y="1143000"/>
-            <a:ext cx="5486400" cy="3086100"/>
-          </a:xfrm>
-          <a:prstGeom prst="rect">
-            <a:avLst/>
-          </a:prstGeom>
-          <a:noFill/>
-          <a:ln w="12700">
-            <a:solidFill>
-              <a:prstClr val="black"/>
-            </a:solidFill>
-          </a:ln>
-        </p:spPr>
-        <p:txBody>
-          <a:bodyPr vert="horz" lIns="91440" tIns="45720" rIns="91440" bIns="45720" rtlCol="0" anchor="ctr"/>
-          <a:lstStyle/>
-          <a:p>
-            <a:endParaRPr lang="en-US"/>
-          </a:p>
-        </p:txBody>
-      </p:sp>
-      <p:sp>
-        <p:nvSpPr>
-          <p:cNvPr id="5" name="Notes Placeholder 4"/>
-          <p:cNvSpPr>
-            <a:spLocks noGrp="1"/>
-          </p:cNvSpPr>
-          <p:nvPr>
-            <p:ph type="body" sz="quarter" idx="3"/>
-          </p:nvPr>
-        </p:nvSpPr>
-        <p:spPr>
-          <a:xfrm>
-            <a:off x="685800" y="4400550"/>
-            <a:ext cx="5486400" cy="3600450"/>
-          </a:xfrm>
-          <a:prstGeom prst="rect">
-            <a:avLst/>
-          </a:prstGeom>
-        </p:spPr>
-        <p:txBody>
-          <a:bodyPr vert="horz" lIns="91440" tIns="45720" rIns="91440" bIns="45720" rtlCol="0"/>
-          <a:lstStyle/>
-          <a:p>
-            <a:pPr lvl="0"/>
-            <a:r>
-              <a:rPr lang="en-US"/>
-              <a:t>Click to edit Master text styles</a:t>
-            </a:r>
-          </a:p>
-          <a:p>
-            <a:pPr lvl="1"/>
-            <a:r>
-              <a:rPr lang="en-US"/>
-              <a:t>Second level</a:t>
-            </a:r>
-          </a:p>
-          <a:p>
-            <a:pPr lvl="2"/>
-            <a:r>
-              <a:rPr lang="en-US"/>
-              <a:t>Third level</a:t>
-            </a:r>
-          </a:p>
-          <a:p>
-            <a:pPr lvl="3"/>
-            <a:r>
-              <a:rPr lang="en-US"/>
-              <a:t>Fourth level</a:t>
-            </a:r>
-          </a:p>
-          <a:p>
-            <a:pPr lvl="4"/>
-            <a:r>
-              <a:rPr lang="en-US"/>
-              <a:t>Fifth level</a:t>
-            </a:r>
-          </a:p>
-        </p:txBody>
-      </p:sp>
-      <p:sp>
-        <p:nvSpPr>
-          <p:cNvPr id="6" name="Footer Placeholder 5"/>
-          <p:cNvSpPr>
-            <a:spLocks noGrp="1"/>
-          </p:cNvSpPr>
-          <p:nvPr>
-            <p:ph type="ftr" sz="quarter" idx="4"/>
-          </p:nvPr>
-        </p:nvSpPr>
-        <p:spPr>
-          <a:xfrm>
-            <a:off x="0" y="8685213"/>
-            <a:ext cx="2971800" cy="458787"/>
-          </a:xfrm>
-          <a:prstGeom prst="rect">
-            <a:avLst/>
-          </a:prstGeom>
-        </p:spPr>
-        <p:txBody>
-          <a:bodyPr vert="horz" lIns="91440" tIns="45720" rIns="91440" bIns="45720" rtlCol="0" anchor="b"/>
-          <a:lstStyle>
-            <a:lvl1pPr algn="l">
-              <a:defRPr sz="1200"/>
-            </a:lvl1pPr>
-          </a:lstStyle>
-          <a:p>
-            <a:endParaRPr lang="en-US"/>
-          </a:p>
-        </p:txBody>
-      </p:sp>
-      <p:sp>
-        <p:nvSpPr>
-          <p:cNvPr id="7" name="Slide Number Placeholder 6"/>
-          <p:cNvSpPr>
-            <a:spLocks noGrp="1"/>
-          </p:cNvSpPr>
-          <p:nvPr>
-            <p:ph type="sldNum" sz="quarter" idx="5"/>
-          </p:nvPr>
-        </p:nvSpPr>
-        <p:spPr>
-          <a:xfrm>
-            <a:off x="3884613" y="8685213"/>
-            <a:ext cx="2971800" cy="458787"/>
-          </a:xfrm>
-          <a:prstGeom prst="rect">
-            <a:avLst/>
-          </a:prstGeom>
-        </p:spPr>
-        <p:txBody>
-          <a:bodyPr vert="horz" lIns="91440" tIns="45720" rIns="91440" bIns="45720" rtlCol="0" anchor="b"/>
-          <a:lstStyle>
-            <a:lvl1pPr algn="r">
-              <a:defRPr sz="1200"/>
-            </a:lvl1pPr>
-          </a:lstStyle>
-          <a:p>
-            <a:fld id="{CE5E9CC1-C706-0F49-92D6-E571CC5EEA8F}" type="slidenum">
-              <a:rPr lang="en-US"/>
-              <a:t>‹#›</a:t>
-            </a:fld>
-            <a:endParaRPr lang="en-US"/>
-          </a:p>
-        </p:txBody>
-      </p:sp>
     </p:spTree>
     <p:extLst>
       <p:ext uri="{BB962C8B-B14F-4D97-AF65-F5344CB8AC3E}">
-        <p14:creationId xmlns:p14="http://schemas.microsoft.com/office/powerpoint/2010/main" val="1024086991"/>
+        <p14:creationId xmlns:p14="http://schemas.microsoft.com/office/powerpoint/2010/main" val="1303778113"/>
       </p:ext>
     </p:extLst>
   </p:cSld>
@@ -509,10 +290,6 @@
           <a:bodyPr/>
           <a:lstStyle/>
           <a:p>
-            <a:r>
-              <a:rPr lang="en-US" dirty="0"/>
-              <a:t/>
-            </a:r>
             <a:endParaRPr lang="en-US" dirty="0"/>
           </a:p>
         </p:txBody>
@@ -597,10 +374,6 @@
           <a:bodyPr/>
           <a:lstStyle/>
           <a:p>
-            <a:r>
-              <a:rPr lang="en-US" dirty="0"/>
-              <a:t/>
-            </a:r>
             <a:endParaRPr lang="en-US" dirty="0"/>
           </a:p>
         </p:txBody>
@@ -685,10 +458,6 @@
           <a:bodyPr/>
           <a:lstStyle/>
           <a:p>
-            <a:r>
-              <a:rPr lang="en-US" dirty="0"/>
-              <a:t/>
-            </a:r>
             <a:endParaRPr lang="en-US" dirty="0"/>
           </a:p>
         </p:txBody>
@@ -773,10 +542,6 @@
           <a:bodyPr/>
           <a:lstStyle/>
           <a:p>
-            <a:r>
-              <a:rPr lang="en-US" dirty="0"/>
-              <a:t/>
-            </a:r>
             <a:endParaRPr lang="en-US" dirty="0"/>
           </a:p>
         </p:txBody>
@@ -861,10 +626,6 @@
           <a:bodyPr/>
           <a:lstStyle/>
           <a:p>
-            <a:r>
-              <a:rPr lang="en-US" dirty="0"/>
-              <a:t/>
-            </a:r>
             <a:endParaRPr lang="en-US" dirty="0"/>
           </a:p>
         </p:txBody>
@@ -949,10 +710,6 @@
           <a:bodyPr/>
           <a:lstStyle/>
           <a:p>
-            <a:r>
-              <a:rPr lang="en-US" dirty="0"/>
-              <a:t/>
-            </a:r>
             <a:endParaRPr lang="en-US" dirty="0"/>
           </a:p>
         </p:txBody>
@@ -1037,10 +794,6 @@
           <a:bodyPr/>
           <a:lstStyle/>
           <a:p>
-            <a:r>
-              <a:rPr lang="en-US" dirty="0"/>
-              <a:t/>
-            </a:r>
             <a:endParaRPr lang="en-US" dirty="0"/>
           </a:p>
         </p:txBody>
@@ -1125,10 +878,6 @@
           <a:bodyPr/>
           <a:lstStyle/>
           <a:p>
-            <a:r>
-              <a:rPr lang="en-US" dirty="0"/>
-              <a:t/>
-            </a:r>
             <a:endParaRPr lang="en-US" dirty="0"/>
           </a:p>
         </p:txBody>
@@ -1213,10 +962,6 @@
           <a:bodyPr/>
           <a:lstStyle/>
           <a:p>
-            <a:r>
-              <a:rPr lang="en-US" dirty="0"/>
-              <a:t/>
-            </a:r>
             <a:endParaRPr lang="en-US" dirty="0"/>
           </a:p>
         </p:txBody>
@@ -1301,10 +1046,6 @@
           <a:bodyPr/>
           <a:lstStyle/>
           <a:p>
-            <a:r>
-              <a:rPr lang="en-US" dirty="0"/>
-              <a:t/>
-            </a:r>
             <a:endParaRPr lang="en-US" dirty="0"/>
           </a:p>
         </p:txBody>
@@ -1378,6 +1119,11 @@
 <file path=ppt/slideMasters/slideMaster1.xml><?xml version="1.0" encoding="utf-8"?>
 <p:sldMaster xmlns:a="http://schemas.openxmlformats.org/drawingml/2006/main" xmlns:r="http://schemas.openxmlformats.org/officeDocument/2006/relationships" xmlns:p="http://schemas.openxmlformats.org/presentationml/2006/main">
   <p:cSld>
+    <p:bg>
+      <p:bgRef idx="1001">
+        <a:schemeClr val="bg1"/>
+      </p:bgRef>
+    </p:bg>
     <p:spTree>
       <p:nvGrpSpPr>
         <p:cNvPr id="1" name=""/>
@@ -1660,6 +1406,7 @@
         <a:solidFill>
           <a:srgbClr val="0A1628"/>
         </a:solidFill>
+        <a:effectLst/>
       </p:bgPr>
     </p:bg>
     <p:spTree>
@@ -1761,14 +1508,14 @@
       </p:sp>
       <p:pic>
         <p:nvPicPr>
-          <p:cNvPr id="5" name="Image 0" descr="preencoded.png">    </p:cNvPr>
+          <p:cNvPr id="5" name="Image 0" descr="preencoded.png"/>
           <p:cNvPicPr>
             <a:picLocks noChangeAspect="1"/>
           </p:cNvPicPr>
           <p:nvPr/>
         </p:nvPicPr>
         <p:blipFill>
-          <a:blip r:embed="rId1"/>
+          <a:blip r:embed="rId3"/>
           <a:stretch>
             <a:fillRect/>
           </a:stretch>
@@ -1829,7 +1576,7 @@
           <a:bodyPr wrap="square" lIns="0" tIns="0" rIns="0" bIns="0" rtlCol="0" anchor="ctr"/>
           <a:lstStyle/>
           <a:p>
-            <a:pPr algn="ctr" indent="0" marL="0">
+            <a:pPr marL="0" indent="0" algn="ctr">
               <a:buNone/>
             </a:pPr>
             <a:r>
@@ -1838,7 +1585,7 @@
                   <a:srgbClr val="0A1628"/>
                 </a:solidFill>
               </a:rPr>
-              <a:t>TELEHEALTH</a:t>
+              <a:t>TELE-HEALTH</a:t>
             </a:r>
             <a:endParaRPr lang="en-US" sz="900" dirty="0"/>
           </a:p>
@@ -1865,7 +1612,7 @@
           <a:bodyPr wrap="square" rtlCol="0" anchor="ctr"/>
           <a:lstStyle/>
           <a:p>
-            <a:pPr indent="0" marL="0">
+            <a:pPr marL="0" indent="0">
               <a:buNone/>
             </a:pPr>
             <a:r>
@@ -1904,7 +1651,7 @@
           <a:bodyPr wrap="square" rtlCol="0" anchor="ctr"/>
           <a:lstStyle/>
           <a:p>
-            <a:pPr indent="0" marL="0">
+            <a:pPr marL="0" indent="0">
               <a:buNone/>
             </a:pPr>
             <a:r>
@@ -1943,7 +1690,7 @@
           <a:bodyPr wrap="square" rtlCol="0" anchor="ctr"/>
           <a:lstStyle/>
           <a:p>
-            <a:pPr indent="0" marL="0">
+            <a:pPr marL="0" indent="0">
               <a:buNone/>
             </a:pPr>
             <a:r>
@@ -1960,7 +1707,7 @@
             <a:endParaRPr lang="en-US" sz="1300" dirty="0"/>
           </a:p>
           <a:p>
-            <a:pPr indent="0" marL="0">
+            <a:pPr marL="0" indent="0">
               <a:buNone/>
             </a:pPr>
             <a:r>
@@ -2024,7 +1771,7 @@
           <a:bodyPr wrap="square" rtlCol="0" anchor="ctr"/>
           <a:lstStyle/>
           <a:p>
-            <a:pPr indent="0" marL="0">
+            <a:pPr marL="0" indent="0">
               <a:buNone/>
             </a:pPr>
             <a:r>
@@ -2038,9 +1785,6 @@
               </a:rPr>
               <a:t>Presented by: </a:t>
             </a:r>
-            <a:pPr indent="0" marL="0">
-              <a:buNone/>
-            </a:pPr>
             <a:r>
               <a:rPr lang="en-US" sz="1200" b="1" dirty="0">
                 <a:solidFill>
@@ -2077,7 +1821,7 @@
           <a:bodyPr wrap="square" rtlCol="0" anchor="ctr"/>
           <a:lstStyle/>
           <a:p>
-            <a:pPr indent="0" marL="0">
+            <a:pPr marL="0" indent="0">
               <a:buNone/>
             </a:pPr>
             <a:r>
@@ -2091,9 +1835,6 @@
               </a:rPr>
               <a:t>Roll No: </a:t>
             </a:r>
-            <a:pPr indent="0" marL="0">
-              <a:buNone/>
-            </a:pPr>
             <a:r>
               <a:rPr lang="en-US" sz="1200" b="1" dirty="0">
                 <a:solidFill>
@@ -2130,7 +1871,7 @@
           <a:bodyPr wrap="square" rtlCol="0" anchor="ctr"/>
           <a:lstStyle/>
           <a:p>
-            <a:pPr indent="0" marL="0">
+            <a:pPr marL="0" indent="0">
               <a:buNone/>
             </a:pPr>
             <a:r>
@@ -2194,7 +1935,7 @@
           <a:bodyPr wrap="square" rtlCol="0" anchor="ctr"/>
           <a:lstStyle/>
           <a:p>
-            <a:pPr algn="ctr" indent="0" marL="0">
+            <a:pPr marL="0" indent="0" algn="ctr">
               <a:buNone/>
             </a:pPr>
             <a:r>
@@ -2225,6 +1966,7 @@
         <a:solidFill>
           <a:srgbClr val="0A1628"/>
         </a:solidFill>
+        <a:effectLst/>
       </p:bgPr>
     </p:bg>
     <p:spTree>
@@ -2301,14 +2043,14 @@
       </p:sp>
       <p:pic>
         <p:nvPicPr>
-          <p:cNvPr id="4" name="Image 0" descr="preencoded.png">    </p:cNvPr>
+          <p:cNvPr id="4" name="Image 0" descr="preencoded.png"/>
           <p:cNvPicPr>
             <a:picLocks noChangeAspect="1"/>
           </p:cNvPicPr>
           <p:nvPr/>
         </p:nvPicPr>
         <p:blipFill>
-          <a:blip r:embed="rId1"/>
+          <a:blip r:embed="rId3"/>
           <a:stretch>
             <a:fillRect/>
           </a:stretch>
@@ -2344,7 +2086,7 @@
           <a:bodyPr wrap="square" rtlCol="0" anchor="ctr"/>
           <a:lstStyle/>
           <a:p>
-            <a:pPr algn="ctr" indent="0" marL="0">
+            <a:pPr marL="0" indent="0" algn="ctr">
               <a:buNone/>
             </a:pPr>
             <a:r>
@@ -2383,20 +2125,9 @@
           <a:bodyPr wrap="square" rtlCol="0" anchor="ctr"/>
           <a:lstStyle/>
           <a:p>
-            <a:pPr algn="ctr" indent="0" marL="0">
-              <a:buNone/>
-            </a:pPr>
-            <a:r>
-              <a:rPr lang="en-US" sz="1800" i="1" dirty="0">
-                <a:solidFill>
-                  <a:srgbClr val="00C2A8"/>
-                </a:solidFill>
-                <a:latin typeface="Calibri" pitchFamily="34" charset="0"/>
-                <a:ea typeface="Calibri" pitchFamily="34" charset="-122"/>
-                <a:cs typeface="Calibri" pitchFamily="34" charset="-120"/>
-              </a:rPr>
-              <a:t>Questions &amp; Feedback Welcome</a:t>
-            </a:r>
+            <a:pPr marL="0" indent="0" algn="ctr">
+              <a:buNone/>
+            </a:pPr>
             <a:endParaRPr lang="en-US" sz="1800" dirty="0"/>
           </a:p>
         </p:txBody>
@@ -2447,7 +2178,7 @@
           <a:bodyPr wrap="square" rtlCol="0" anchor="ctr"/>
           <a:lstStyle/>
           <a:p>
-            <a:pPr algn="ctr" indent="0" marL="0">
+            <a:pPr marL="0" indent="0" algn="ctr">
               <a:buNone/>
             </a:pPr>
             <a:r>
@@ -2486,7 +2217,7 @@
           <a:bodyPr wrap="square" rtlCol="0" anchor="ctr"/>
           <a:lstStyle/>
           <a:p>
-            <a:pPr algn="ctr" indent="0" marL="0">
+            <a:pPr marL="0" indent="0" algn="ctr">
               <a:buNone/>
             </a:pPr>
             <a:r>
@@ -2520,6 +2251,7 @@
         <a:solidFill>
           <a:srgbClr val="F8FAFC"/>
         </a:solidFill>
+        <a:effectLst/>
       </p:bgPr>
     </p:bg>
     <p:spTree>
@@ -2607,7 +2339,7 @@
           <a:bodyPr wrap="square" rtlCol="0" anchor="ctr"/>
           <a:lstStyle/>
           <a:p>
-            <a:pPr indent="0" marL="0">
+            <a:pPr marL="0" indent="0">
               <a:buNone/>
             </a:pPr>
             <a:r>
@@ -2646,7 +2378,7 @@
           <a:bodyPr wrap="square" rtlCol="0" anchor="ctr"/>
           <a:lstStyle/>
           <a:p>
-            <a:pPr algn="r" indent="0" marL="0">
+            <a:pPr marL="0" indent="0" algn="r">
               <a:buNone/>
             </a:pPr>
             <a:r>
@@ -2663,14 +2395,14 @@
       </p:sp>
       <p:pic>
         <p:nvPicPr>
-          <p:cNvPr id="6" name="Image 0" descr="preencoded.png">    </p:cNvPr>
+          <p:cNvPr id="6" name="Image 0" descr="preencoded.png"/>
           <p:cNvPicPr>
             <a:picLocks noChangeAspect="1"/>
           </p:cNvPicPr>
           <p:nvPr/>
         </p:nvPicPr>
         <p:blipFill>
-          <a:blip r:embed="rId1"/>
+          <a:blip r:embed="rId3"/>
           <a:stretch>
             <a:fillRect/>
           </a:stretch>
@@ -2706,7 +2438,7 @@
           <a:bodyPr wrap="square" rtlCol="0" anchor="ctr"/>
           <a:lstStyle/>
           <a:p>
-            <a:pPr indent="0" marL="0">
+            <a:pPr marL="0" indent="0">
               <a:buNone/>
             </a:pPr>
             <a:r>
@@ -2748,7 +2480,7 @@
             <a:prstDash val="solid"/>
           </a:ln>
           <a:effectLst>
-            <a:outerShdw sx="100000" sy="100000" kx="0" ky="0" algn="bl" rotWithShape="0" blurRad="101600" dist="38100" dir="8100000">
+            <a:outerShdw blurRad="101600" dist="38100" dir="8100000" algn="bl" rotWithShape="0">
               <a:srgbClr val="000000">
                 <a:alpha val="18000"/>
               </a:srgbClr>
@@ -2802,7 +2534,7 @@
           <a:bodyPr wrap="square" rtlCol="0" anchor="ctr"/>
           <a:lstStyle/>
           <a:p>
-            <a:pPr indent="0" marL="0">
+            <a:pPr marL="0" indent="0">
               <a:buNone/>
             </a:pPr>
             <a:r>
@@ -2841,7 +2573,7 @@
           <a:bodyPr wrap="square" rtlCol="0" anchor="ctr"/>
           <a:lstStyle/>
           <a:p>
-            <a:pPr indent="0" marL="0">
+            <a:pPr marL="0" indent="0">
               <a:buNone/>
             </a:pPr>
             <a:r>
@@ -2883,7 +2615,7 @@
             <a:prstDash val="solid"/>
           </a:ln>
           <a:effectLst>
-            <a:outerShdw sx="100000" sy="100000" kx="0" ky="0" algn="bl" rotWithShape="0" blurRad="101600" dist="38100" dir="8100000">
+            <a:outerShdw blurRad="101600" dist="38100" dir="8100000" algn="bl" rotWithShape="0">
               <a:srgbClr val="000000">
                 <a:alpha val="18000"/>
               </a:srgbClr>
@@ -2937,7 +2669,7 @@
           <a:bodyPr wrap="square" rtlCol="0" anchor="ctr"/>
           <a:lstStyle/>
           <a:p>
-            <a:pPr indent="0" marL="0">
+            <a:pPr marL="0" indent="0">
               <a:buNone/>
             </a:pPr>
             <a:r>
@@ -2976,7 +2708,7 @@
           <a:bodyPr wrap="square" rtlCol="0" anchor="ctr"/>
           <a:lstStyle/>
           <a:p>
-            <a:pPr indent="0" marL="0">
+            <a:pPr marL="0" indent="0">
               <a:buNone/>
             </a:pPr>
             <a:r>
@@ -3018,7 +2750,7 @@
             <a:prstDash val="solid"/>
           </a:ln>
           <a:effectLst>
-            <a:outerShdw sx="100000" sy="100000" kx="0" ky="0" algn="bl" rotWithShape="0" blurRad="101600" dist="38100" dir="8100000">
+            <a:outerShdw blurRad="101600" dist="38100" dir="8100000" algn="bl" rotWithShape="0">
               <a:srgbClr val="000000">
                 <a:alpha val="18000"/>
               </a:srgbClr>
@@ -3072,7 +2804,7 @@
           <a:bodyPr wrap="square" rtlCol="0" anchor="ctr"/>
           <a:lstStyle/>
           <a:p>
-            <a:pPr indent="0" marL="0">
+            <a:pPr marL="0" indent="0">
               <a:buNone/>
             </a:pPr>
             <a:r>
@@ -3111,7 +2843,7 @@
           <a:bodyPr wrap="square" rtlCol="0" anchor="ctr"/>
           <a:lstStyle/>
           <a:p>
-            <a:pPr indent="0" marL="0">
+            <a:pPr marL="0" indent="0">
               <a:buNone/>
             </a:pPr>
             <a:r>
@@ -3153,7 +2885,7 @@
             <a:prstDash val="solid"/>
           </a:ln>
           <a:effectLst>
-            <a:outerShdw sx="100000" sy="100000" kx="0" ky="0" algn="bl" rotWithShape="0" blurRad="101600" dist="38100" dir="8100000">
+            <a:outerShdw blurRad="101600" dist="38100" dir="8100000" algn="bl" rotWithShape="0">
               <a:srgbClr val="000000">
                 <a:alpha val="18000"/>
               </a:srgbClr>
@@ -3207,7 +2939,7 @@
           <a:bodyPr wrap="square" rtlCol="0" anchor="ctr"/>
           <a:lstStyle/>
           <a:p>
-            <a:pPr indent="0" marL="0">
+            <a:pPr marL="0" indent="0">
               <a:buNone/>
             </a:pPr>
             <a:r>
@@ -3246,7 +2978,7 @@
           <a:bodyPr wrap="square" rtlCol="0" anchor="ctr"/>
           <a:lstStyle/>
           <a:p>
-            <a:pPr indent="0" marL="0">
+            <a:pPr marL="0" indent="0">
               <a:buNone/>
             </a:pPr>
             <a:r>
@@ -3310,7 +3042,7 @@
           <a:bodyPr wrap="square" rtlCol="0" anchor="ctr"/>
           <a:lstStyle/>
           <a:p>
-            <a:pPr indent="0" marL="0">
+            <a:pPr marL="0" indent="0">
               <a:buNone/>
             </a:pPr>
             <a:r>
@@ -3344,6 +3076,7 @@
         <a:solidFill>
           <a:srgbClr val="F8FAFC"/>
         </a:solidFill>
+        <a:effectLst/>
       </p:bgPr>
     </p:bg>
     <p:spTree>
@@ -3431,7 +3164,7 @@
           <a:bodyPr wrap="square" rtlCol="0" anchor="ctr"/>
           <a:lstStyle/>
           <a:p>
-            <a:pPr indent="0" marL="0">
+            <a:pPr marL="0" indent="0">
               <a:buNone/>
             </a:pPr>
             <a:r>
@@ -3470,7 +3203,7 @@
           <a:bodyPr wrap="square" rtlCol="0" anchor="ctr"/>
           <a:lstStyle/>
           <a:p>
-            <a:pPr algn="r" indent="0" marL="0">
+            <a:pPr marL="0" indent="0" algn="r">
               <a:buNone/>
             </a:pPr>
             <a:r>
@@ -3509,7 +3242,7 @@
             <a:prstDash val="solid"/>
           </a:ln>
           <a:effectLst>
-            <a:outerShdw sx="100000" sy="100000" kx="0" ky="0" algn="bl" rotWithShape="0" blurRad="101600" dist="38100" dir="8100000">
+            <a:outerShdw blurRad="101600" dist="38100" dir="8100000" algn="bl" rotWithShape="0">
               <a:srgbClr val="000000">
                 <a:alpha val="18000"/>
               </a:srgbClr>
@@ -3563,7 +3296,7 @@
           <a:bodyPr wrap="square" rtlCol="0" anchor="ctr"/>
           <a:lstStyle/>
           <a:p>
-            <a:pPr indent="0" marL="0">
+            <a:pPr marL="0" indent="0">
               <a:buNone/>
             </a:pPr>
             <a:r>
@@ -3602,7 +3335,7 @@
           <a:bodyPr wrap="square" rtlCol="0" anchor="ctr"/>
           <a:lstStyle/>
           <a:p>
-            <a:pPr indent="0" marL="0">
+            <a:pPr marL="0" indent="0">
               <a:buNone/>
             </a:pPr>
             <a:r>
@@ -3616,9 +3349,6 @@
               </a:rPr>
               <a:t>1. </a:t>
             </a:r>
-            <a:pPr indent="0" marL="0">
-              <a:buNone/>
-            </a:pPr>
             <a:r>
               <a:rPr lang="en-US" sz="1100" dirty="0">
                 <a:solidFill>
@@ -3655,7 +3385,7 @@
           <a:bodyPr wrap="square" rtlCol="0" anchor="ctr"/>
           <a:lstStyle/>
           <a:p>
-            <a:pPr indent="0" marL="0">
+            <a:pPr marL="0" indent="0">
               <a:buNone/>
             </a:pPr>
             <a:r>
@@ -3669,9 +3399,6 @@
               </a:rPr>
               <a:t>2. </a:t>
             </a:r>
-            <a:pPr indent="0" marL="0">
-              <a:buNone/>
-            </a:pPr>
             <a:r>
               <a:rPr lang="en-US" sz="1100" dirty="0">
                 <a:solidFill>
@@ -3708,7 +3435,7 @@
           <a:bodyPr wrap="square" rtlCol="0" anchor="ctr"/>
           <a:lstStyle/>
           <a:p>
-            <a:pPr indent="0" marL="0">
+            <a:pPr marL="0" indent="0">
               <a:buNone/>
             </a:pPr>
             <a:r>
@@ -3722,9 +3449,6 @@
               </a:rPr>
               <a:t>3. </a:t>
             </a:r>
-            <a:pPr indent="0" marL="0">
-              <a:buNone/>
-            </a:pPr>
             <a:r>
               <a:rPr lang="en-US" sz="1100" dirty="0">
                 <a:solidFill>
@@ -3761,7 +3485,7 @@
           <a:bodyPr wrap="square" rtlCol="0" anchor="ctr"/>
           <a:lstStyle/>
           <a:p>
-            <a:pPr indent="0" marL="0">
+            <a:pPr marL="0" indent="0">
               <a:buNone/>
             </a:pPr>
             <a:r>
@@ -3775,9 +3499,6 @@
               </a:rPr>
               <a:t>4. </a:t>
             </a:r>
-            <a:pPr indent="0" marL="0">
-              <a:buNone/>
-            </a:pPr>
             <a:r>
               <a:rPr lang="en-US" sz="1100" dirty="0">
                 <a:solidFill>
@@ -3814,7 +3535,7 @@
           <a:bodyPr wrap="square" rtlCol="0" anchor="ctr"/>
           <a:lstStyle/>
           <a:p>
-            <a:pPr indent="0" marL="0">
+            <a:pPr marL="0" indent="0">
               <a:buNone/>
             </a:pPr>
             <a:r>
@@ -3828,9 +3549,6 @@
               </a:rPr>
               <a:t>5. </a:t>
             </a:r>
-            <a:pPr indent="0" marL="0">
-              <a:buNone/>
-            </a:pPr>
             <a:r>
               <a:rPr lang="en-US" sz="1100" dirty="0">
                 <a:solidFill>
@@ -3870,7 +3588,7 @@
             <a:prstDash val="solid"/>
           </a:ln>
           <a:effectLst>
-            <a:outerShdw sx="100000" sy="100000" kx="0" ky="0" algn="bl" rotWithShape="0" blurRad="101600" dist="38100" dir="8100000">
+            <a:outerShdw blurRad="101600" dist="38100" dir="8100000" algn="bl" rotWithShape="0">
               <a:srgbClr val="000000">
                 <a:alpha val="18000"/>
               </a:srgbClr>
@@ -3924,7 +3642,7 @@
           <a:bodyPr wrap="square" rtlCol="0" anchor="ctr"/>
           <a:lstStyle/>
           <a:p>
-            <a:pPr indent="0" marL="0">
+            <a:pPr marL="0" indent="0">
               <a:buNone/>
             </a:pPr>
             <a:r>
@@ -3963,7 +3681,7 @@
           <a:bodyPr wrap="square" rtlCol="0" anchor="ctr"/>
           <a:lstStyle/>
           <a:p>
-            <a:pPr indent="0" marL="0">
+            <a:pPr marL="0" indent="0">
               <a:buNone/>
             </a:pPr>
             <a:r>
@@ -4002,7 +3720,7 @@
           <a:bodyPr wrap="square" rtlCol="0" anchor="ctr"/>
           <a:lstStyle/>
           <a:p>
-            <a:pPr indent="0" marL="0">
+            <a:pPr marL="0" indent="0">
               <a:buNone/>
             </a:pPr>
             <a:r>
@@ -4041,7 +3759,7 @@
           <a:bodyPr wrap="square" rtlCol="0" anchor="ctr"/>
           <a:lstStyle/>
           <a:p>
-            <a:pPr indent="0" marL="0">
+            <a:pPr marL="0" indent="0">
               <a:buNone/>
             </a:pPr>
             <a:r>
@@ -4080,7 +3798,7 @@
           <a:bodyPr wrap="square" rtlCol="0" anchor="ctr"/>
           <a:lstStyle/>
           <a:p>
-            <a:pPr indent="0" marL="0">
+            <a:pPr marL="0" indent="0">
               <a:buNone/>
             </a:pPr>
             <a:r>
@@ -4119,7 +3837,7 @@
           <a:bodyPr wrap="square" rtlCol="0" anchor="ctr"/>
           <a:lstStyle/>
           <a:p>
-            <a:pPr indent="0" marL="0">
+            <a:pPr marL="0" indent="0">
               <a:buNone/>
             </a:pPr>
             <a:r>
@@ -4158,7 +3876,7 @@
           <a:bodyPr wrap="square" rtlCol="0" anchor="ctr"/>
           <a:lstStyle/>
           <a:p>
-            <a:pPr indent="0" marL="0">
+            <a:pPr marL="0" indent="0">
               <a:buNone/>
             </a:pPr>
             <a:r>
@@ -4197,7 +3915,7 @@
           <a:bodyPr wrap="square" rtlCol="0" anchor="ctr"/>
           <a:lstStyle/>
           <a:p>
-            <a:pPr indent="0" marL="0">
+            <a:pPr marL="0" indent="0">
               <a:buNone/>
             </a:pPr>
             <a:r>
@@ -4236,7 +3954,7 @@
           <a:bodyPr wrap="square" rtlCol="0" anchor="ctr"/>
           <a:lstStyle/>
           <a:p>
-            <a:pPr indent="0" marL="0">
+            <a:pPr marL="0" indent="0">
               <a:buNone/>
             </a:pPr>
             <a:r>
@@ -4270,6 +3988,7 @@
         <a:solidFill>
           <a:srgbClr val="0A1628"/>
         </a:solidFill>
+        <a:effectLst/>
       </p:bgPr>
     </p:bg>
     <p:spTree>
@@ -4357,7 +4076,7 @@
           <a:bodyPr wrap="square" rtlCol="0" anchor="ctr"/>
           <a:lstStyle/>
           <a:p>
-            <a:pPr indent="0" marL="0">
+            <a:pPr marL="0" indent="0">
               <a:buNone/>
             </a:pPr>
             <a:r>
@@ -4396,7 +4115,7 @@
           <a:bodyPr wrap="square" rtlCol="0" anchor="ctr"/>
           <a:lstStyle/>
           <a:p>
-            <a:pPr algn="r" indent="0" marL="0">
+            <a:pPr marL="0" indent="0" algn="r">
               <a:buNone/>
             </a:pPr>
             <a:r>
@@ -4435,7 +4154,7 @@
             <a:prstDash val="solid"/>
           </a:ln>
           <a:effectLst>
-            <a:outerShdw sx="100000" sy="100000" kx="0" ky="0" algn="bl" rotWithShape="0" blurRad="101600" dist="38100" dir="8100000">
+            <a:outerShdw blurRad="101600" dist="38100" dir="8100000" algn="bl" rotWithShape="0">
               <a:srgbClr val="000000">
                 <a:alpha val="18000"/>
               </a:srgbClr>
@@ -4470,14 +4189,14 @@
       </p:sp>
       <p:pic>
         <p:nvPicPr>
-          <p:cNvPr id="8" name="Image 0" descr="preencoded.png">    </p:cNvPr>
+          <p:cNvPr id="8" name="Image 0" descr="preencoded.png"/>
           <p:cNvPicPr>
             <a:picLocks noChangeAspect="1"/>
           </p:cNvPicPr>
           <p:nvPr/>
         </p:nvPicPr>
         <p:blipFill>
-          <a:blip r:embed="rId1"/>
+          <a:blip r:embed="rId3"/>
           <a:stretch>
             <a:fillRect/>
           </a:stretch>
@@ -4513,7 +4232,7 @@
           <a:bodyPr wrap="square" rtlCol="0" anchor="ctr"/>
           <a:lstStyle/>
           <a:p>
-            <a:pPr algn="ctr" indent="0" marL="0">
+            <a:pPr marL="0" indent="0" algn="ctr">
               <a:buNone/>
             </a:pPr>
             <a:r>
@@ -4552,7 +4271,7 @@
           <a:bodyPr wrap="square" rtlCol="0" anchor="ctr"/>
           <a:lstStyle/>
           <a:p>
-            <a:pPr indent="0" marL="0">
+            <a:pPr marL="0" indent="0">
               <a:buNone/>
             </a:pPr>
             <a:r>
@@ -4566,9 +4285,6 @@
               </a:rPr>
               <a:t>→  </a:t>
             </a:r>
-            <a:pPr indent="0" marL="0">
-              <a:buNone/>
-            </a:pPr>
             <a:r>
               <a:rPr lang="en-US" sz="1050" dirty="0">
                 <a:solidFill>
@@ -4605,7 +4321,7 @@
           <a:bodyPr wrap="square" rtlCol="0" anchor="ctr"/>
           <a:lstStyle/>
           <a:p>
-            <a:pPr indent="0" marL="0">
+            <a:pPr marL="0" indent="0">
               <a:buNone/>
             </a:pPr>
             <a:r>
@@ -4619,9 +4335,6 @@
               </a:rPr>
               <a:t>→  </a:t>
             </a:r>
-            <a:pPr indent="0" marL="0">
-              <a:buNone/>
-            </a:pPr>
             <a:r>
               <a:rPr lang="en-US" sz="1050" dirty="0">
                 <a:solidFill>
@@ -4658,7 +4371,7 @@
           <a:bodyPr wrap="square" rtlCol="0" anchor="ctr"/>
           <a:lstStyle/>
           <a:p>
-            <a:pPr indent="0" marL="0">
+            <a:pPr marL="0" indent="0">
               <a:buNone/>
             </a:pPr>
             <a:r>
@@ -4672,9 +4385,6 @@
               </a:rPr>
               <a:t>→  </a:t>
             </a:r>
-            <a:pPr indent="0" marL="0">
-              <a:buNone/>
-            </a:pPr>
             <a:r>
               <a:rPr lang="en-US" sz="1050" dirty="0">
                 <a:solidFill>
@@ -4711,7 +4421,7 @@
           <a:bodyPr wrap="square" rtlCol="0" anchor="ctr"/>
           <a:lstStyle/>
           <a:p>
-            <a:pPr indent="0" marL="0">
+            <a:pPr marL="0" indent="0">
               <a:buNone/>
             </a:pPr>
             <a:r>
@@ -4725,9 +4435,6 @@
               </a:rPr>
               <a:t>→  </a:t>
             </a:r>
-            <a:pPr indent="0" marL="0">
-              <a:buNone/>
-            </a:pPr>
             <a:r>
               <a:rPr lang="en-US" sz="1050" dirty="0">
                 <a:solidFill>
@@ -4767,7 +4474,7 @@
             <a:prstDash val="solid"/>
           </a:ln>
           <a:effectLst>
-            <a:outerShdw sx="100000" sy="100000" kx="0" ky="0" algn="bl" rotWithShape="0" blurRad="101600" dist="38100" dir="8100000">
+            <a:outerShdw blurRad="101600" dist="38100" dir="8100000" algn="bl" rotWithShape="0">
               <a:srgbClr val="000000">
                 <a:alpha val="18000"/>
               </a:srgbClr>
@@ -4802,14 +4509,14 @@
       </p:sp>
       <p:pic>
         <p:nvPicPr>
-          <p:cNvPr id="16" name="Image 1" descr="preencoded.png">    </p:cNvPr>
+          <p:cNvPr id="16" name="Image 1" descr="preencoded.png"/>
           <p:cNvPicPr>
             <a:picLocks noChangeAspect="1"/>
           </p:cNvPicPr>
           <p:nvPr/>
         </p:nvPicPr>
         <p:blipFill>
-          <a:blip r:embed="rId2"/>
+          <a:blip r:embed="rId4"/>
           <a:stretch>
             <a:fillRect/>
           </a:stretch>
@@ -4845,7 +4552,7 @@
           <a:bodyPr wrap="square" rtlCol="0" anchor="ctr"/>
           <a:lstStyle/>
           <a:p>
-            <a:pPr algn="ctr" indent="0" marL="0">
+            <a:pPr marL="0" indent="0" algn="ctr">
               <a:buNone/>
             </a:pPr>
             <a:r>
@@ -4884,7 +4591,7 @@
           <a:bodyPr wrap="square" rtlCol="0" anchor="ctr"/>
           <a:lstStyle/>
           <a:p>
-            <a:pPr indent="0" marL="0">
+            <a:pPr marL="0" indent="0">
               <a:buNone/>
             </a:pPr>
             <a:r>
@@ -4898,9 +4605,6 @@
               </a:rPr>
               <a:t>→  </a:t>
             </a:r>
-            <a:pPr indent="0" marL="0">
-              <a:buNone/>
-            </a:pPr>
             <a:r>
               <a:rPr lang="en-US" sz="1050" dirty="0">
                 <a:solidFill>
@@ -4937,7 +4641,7 @@
           <a:bodyPr wrap="square" rtlCol="0" anchor="ctr"/>
           <a:lstStyle/>
           <a:p>
-            <a:pPr indent="0" marL="0">
+            <a:pPr marL="0" indent="0">
               <a:buNone/>
             </a:pPr>
             <a:r>
@@ -4951,9 +4655,6 @@
               </a:rPr>
               <a:t>→  </a:t>
             </a:r>
-            <a:pPr indent="0" marL="0">
-              <a:buNone/>
-            </a:pPr>
             <a:r>
               <a:rPr lang="en-US" sz="1050" dirty="0">
                 <a:solidFill>
@@ -4990,7 +4691,7 @@
           <a:bodyPr wrap="square" rtlCol="0" anchor="ctr"/>
           <a:lstStyle/>
           <a:p>
-            <a:pPr indent="0" marL="0">
+            <a:pPr marL="0" indent="0">
               <a:buNone/>
             </a:pPr>
             <a:r>
@@ -5004,9 +4705,6 @@
               </a:rPr>
               <a:t>→  </a:t>
             </a:r>
-            <a:pPr indent="0" marL="0">
-              <a:buNone/>
-            </a:pPr>
             <a:r>
               <a:rPr lang="en-US" sz="1050" dirty="0">
                 <a:solidFill>
@@ -5043,7 +4741,7 @@
           <a:bodyPr wrap="square" rtlCol="0" anchor="ctr"/>
           <a:lstStyle/>
           <a:p>
-            <a:pPr indent="0" marL="0">
+            <a:pPr marL="0" indent="0">
               <a:buNone/>
             </a:pPr>
             <a:r>
@@ -5057,9 +4755,6 @@
               </a:rPr>
               <a:t>→  </a:t>
             </a:r>
-            <a:pPr indent="0" marL="0">
-              <a:buNone/>
-            </a:pPr>
             <a:r>
               <a:rPr lang="en-US" sz="1050" dirty="0">
                 <a:solidFill>
@@ -5099,7 +4794,7 @@
             <a:prstDash val="solid"/>
           </a:ln>
           <a:effectLst>
-            <a:outerShdw sx="100000" sy="100000" kx="0" ky="0" algn="bl" rotWithShape="0" blurRad="101600" dist="38100" dir="8100000">
+            <a:outerShdw blurRad="101600" dist="38100" dir="8100000" algn="bl" rotWithShape="0">
               <a:srgbClr val="000000">
                 <a:alpha val="18000"/>
               </a:srgbClr>
@@ -5134,14 +4829,14 @@
       </p:sp>
       <p:pic>
         <p:nvPicPr>
-          <p:cNvPr id="24" name="Image 2" descr="preencoded.png">    </p:cNvPr>
+          <p:cNvPr id="24" name="Image 2" descr="preencoded.png"/>
           <p:cNvPicPr>
             <a:picLocks noChangeAspect="1"/>
           </p:cNvPicPr>
           <p:nvPr/>
         </p:nvPicPr>
         <p:blipFill>
-          <a:blip r:embed="rId3"/>
+          <a:blip r:embed="rId5"/>
           <a:stretch>
             <a:fillRect/>
           </a:stretch>
@@ -5177,7 +4872,7 @@
           <a:bodyPr wrap="square" rtlCol="0" anchor="ctr"/>
           <a:lstStyle/>
           <a:p>
-            <a:pPr algn="ctr" indent="0" marL="0">
+            <a:pPr marL="0" indent="0" algn="ctr">
               <a:buNone/>
             </a:pPr>
             <a:r>
@@ -5216,7 +4911,7 @@
           <a:bodyPr wrap="square" rtlCol="0" anchor="ctr"/>
           <a:lstStyle/>
           <a:p>
-            <a:pPr indent="0" marL="0">
+            <a:pPr marL="0" indent="0">
               <a:buNone/>
             </a:pPr>
             <a:r>
@@ -5230,9 +4925,6 @@
               </a:rPr>
               <a:t>→  </a:t>
             </a:r>
-            <a:pPr indent="0" marL="0">
-              <a:buNone/>
-            </a:pPr>
             <a:r>
               <a:rPr lang="en-US" sz="1050" dirty="0">
                 <a:solidFill>
@@ -5269,7 +4961,7 @@
           <a:bodyPr wrap="square" rtlCol="0" anchor="ctr"/>
           <a:lstStyle/>
           <a:p>
-            <a:pPr indent="0" marL="0">
+            <a:pPr marL="0" indent="0">
               <a:buNone/>
             </a:pPr>
             <a:r>
@@ -5283,9 +4975,6 @@
               </a:rPr>
               <a:t>→  </a:t>
             </a:r>
-            <a:pPr indent="0" marL="0">
-              <a:buNone/>
-            </a:pPr>
             <a:r>
               <a:rPr lang="en-US" sz="1050" dirty="0">
                 <a:solidFill>
@@ -5322,7 +5011,7 @@
           <a:bodyPr wrap="square" rtlCol="0" anchor="ctr"/>
           <a:lstStyle/>
           <a:p>
-            <a:pPr indent="0" marL="0">
+            <a:pPr marL="0" indent="0">
               <a:buNone/>
             </a:pPr>
             <a:r>
@@ -5336,9 +5025,6 @@
               </a:rPr>
               <a:t>→  </a:t>
             </a:r>
-            <a:pPr indent="0" marL="0">
-              <a:buNone/>
-            </a:pPr>
             <a:r>
               <a:rPr lang="en-US" sz="1050" dirty="0">
                 <a:solidFill>
@@ -5375,7 +5061,7 @@
           <a:bodyPr wrap="square" rtlCol="0" anchor="ctr"/>
           <a:lstStyle/>
           <a:p>
-            <a:pPr indent="0" marL="0">
+            <a:pPr marL="0" indent="0">
               <a:buNone/>
             </a:pPr>
             <a:r>
@@ -5389,9 +5075,6 @@
               </a:rPr>
               <a:t>→  </a:t>
             </a:r>
-            <a:pPr indent="0" marL="0">
-              <a:buNone/>
-            </a:pPr>
             <a:r>
               <a:rPr lang="en-US" sz="1050" dirty="0">
                 <a:solidFill>
@@ -5455,7 +5138,7 @@
           <a:bodyPr wrap="square" rtlCol="0" anchor="ctr"/>
           <a:lstStyle/>
           <a:p>
-            <a:pPr algn="ctr" indent="0" marL="0">
+            <a:pPr marL="0" indent="0" algn="ctr">
               <a:buNone/>
             </a:pPr>
             <a:r>
@@ -5489,6 +5172,7 @@
         <a:solidFill>
           <a:srgbClr val="0A1628"/>
         </a:solidFill>
+        <a:effectLst/>
       </p:bgPr>
     </p:bg>
     <p:spTree>
@@ -5576,7 +5260,7 @@
           <a:bodyPr wrap="square" rtlCol="0" anchor="ctr"/>
           <a:lstStyle/>
           <a:p>
-            <a:pPr indent="0" marL="0">
+            <a:pPr marL="0" indent="0">
               <a:buNone/>
             </a:pPr>
             <a:r>
@@ -5615,7 +5299,7 @@
           <a:bodyPr wrap="square" rtlCol="0" anchor="ctr"/>
           <a:lstStyle/>
           <a:p>
-            <a:pPr algn="r" indent="0" marL="0">
+            <a:pPr marL="0" indent="0" algn="r">
               <a:buNone/>
             </a:pPr>
             <a:r>
@@ -5701,7 +5385,7 @@
           <a:bodyPr wrap="square" rtlCol="0" anchor="ctr"/>
           <a:lstStyle/>
           <a:p>
-            <a:pPr indent="0" marL="0">
+            <a:pPr marL="0" indent="0">
               <a:buNone/>
             </a:pPr>
             <a:r>
@@ -5721,211 +5405,7 @@
       </p:sp>
       <p:pic>
         <p:nvPicPr>
-          <p:cNvPr id="9" name="Image 0" descr="preencoded.png">    </p:cNvPr>
-          <p:cNvPicPr>
-            <a:picLocks noChangeAspect="1"/>
-          </p:cNvPicPr>
-          <p:nvPr/>
-        </p:nvPicPr>
-        <p:blipFill>
-          <a:blip r:embed="rId1"/>
-          <a:stretch>
-            <a:fillRect/>
-          </a:stretch>
-        </p:blipFill>
-        <p:spPr>
-          <a:xfrm>
-            <a:off x="384048" y="1600200"/>
-            <a:ext cx="274320" cy="274320"/>
-          </a:xfrm>
-          <a:prstGeom prst="rect">
-            <a:avLst/>
-          </a:prstGeom>
-        </p:spPr>
-      </p:pic>
-      <p:sp>
-        <p:nvSpPr>
-          <p:cNvPr id="10" name="Text 7"/>
-          <p:cNvSpPr/>
-          <p:nvPr/>
-        </p:nvSpPr>
-        <p:spPr>
-          <a:xfrm>
-            <a:off x="749808" y="1527048"/>
-            <a:ext cx="3383280" cy="256032"/>
-          </a:xfrm>
-          <a:prstGeom prst="rect">
-            <a:avLst/>
-          </a:prstGeom>
-          <a:noFill/>
-          <a:ln/>
-        </p:spPr>
-        <p:txBody>
-          <a:bodyPr wrap="square" rtlCol="0" anchor="ctr"/>
-          <a:lstStyle/>
-          <a:p>
-            <a:pPr indent="0" marL="0">
-              <a:buNone/>
-            </a:pPr>
-            <a:r>
-              <a:rPr lang="en-US" sz="1150" b="1" dirty="0">
-                <a:solidFill>
-                  <a:srgbClr val="FFFFFF"/>
-                </a:solidFill>
-                <a:latin typeface="Calibri" pitchFamily="34" charset="0"/>
-                <a:ea typeface="Calibri" pitchFamily="34" charset="-122"/>
-                <a:cs typeface="Calibri" pitchFamily="34" charset="-120"/>
-              </a:rPr>
-              <a:t>React + Vite</a:t>
-            </a:r>
-            <a:endParaRPr lang="en-US" sz="1150" dirty="0"/>
-          </a:p>
-        </p:txBody>
-      </p:sp>
-      <p:sp>
-        <p:nvSpPr>
-          <p:cNvPr id="11" name="Text 8"/>
-          <p:cNvSpPr/>
-          <p:nvPr/>
-        </p:nvSpPr>
-        <p:spPr>
-          <a:xfrm>
-            <a:off x="749808" y="1783080"/>
-            <a:ext cx="3383280" cy="292608"/>
-          </a:xfrm>
-          <a:prstGeom prst="rect">
-            <a:avLst/>
-          </a:prstGeom>
-          <a:noFill/>
-          <a:ln/>
-        </p:spPr>
-        <p:txBody>
-          <a:bodyPr wrap="square" rtlCol="0" anchor="ctr"/>
-          <a:lstStyle/>
-          <a:p>
-            <a:pPr indent="0" marL="0">
-              <a:buNone/>
-            </a:pPr>
-            <a:r>
-              <a:rPr lang="en-US" sz="950" dirty="0">
-                <a:solidFill>
-                  <a:srgbClr val="CBD5E1"/>
-                </a:solidFill>
-                <a:latin typeface="Calibri" pitchFamily="34" charset="0"/>
-                <a:ea typeface="Calibri" pitchFamily="34" charset="-122"/>
-                <a:cs typeface="Calibri" pitchFamily="34" charset="-120"/>
-              </a:rPr>
-              <a:t>Component UI with fast HMR builds and optimised production output</a:t>
-            </a:r>
-            <a:endParaRPr lang="en-US" sz="950" dirty="0"/>
-          </a:p>
-        </p:txBody>
-      </p:sp>
-      <p:pic>
-        <p:nvPicPr>
-          <p:cNvPr id="12" name="Image 1" descr="preencoded.png">    </p:cNvPr>
-          <p:cNvPicPr>
-            <a:picLocks noChangeAspect="1"/>
-          </p:cNvPicPr>
-          <p:nvPr/>
-        </p:nvPicPr>
-        <p:blipFill>
-          <a:blip r:embed="rId2"/>
-          <a:stretch>
-            <a:fillRect/>
-          </a:stretch>
-        </p:blipFill>
-        <p:spPr>
-          <a:xfrm>
-            <a:off x="384048" y="2258568"/>
-            <a:ext cx="274320" cy="274320"/>
-          </a:xfrm>
-          <a:prstGeom prst="rect">
-            <a:avLst/>
-          </a:prstGeom>
-        </p:spPr>
-      </p:pic>
-      <p:sp>
-        <p:nvSpPr>
-          <p:cNvPr id="13" name="Text 9"/>
-          <p:cNvSpPr/>
-          <p:nvPr/>
-        </p:nvSpPr>
-        <p:spPr>
-          <a:xfrm>
-            <a:off x="749808" y="2185416"/>
-            <a:ext cx="3383280" cy="256032"/>
-          </a:xfrm>
-          <a:prstGeom prst="rect">
-            <a:avLst/>
-          </a:prstGeom>
-          <a:noFill/>
-          <a:ln/>
-        </p:spPr>
-        <p:txBody>
-          <a:bodyPr wrap="square" rtlCol="0" anchor="ctr"/>
-          <a:lstStyle/>
-          <a:p>
-            <a:pPr indent="0" marL="0">
-              <a:buNone/>
-            </a:pPr>
-            <a:r>
-              <a:rPr lang="en-US" sz="1150" b="1" dirty="0">
-                <a:solidFill>
-                  <a:srgbClr val="FFFFFF"/>
-                </a:solidFill>
-                <a:latin typeface="Calibri" pitchFamily="34" charset="0"/>
-                <a:ea typeface="Calibri" pitchFamily="34" charset="-122"/>
-                <a:cs typeface="Calibri" pitchFamily="34" charset="-120"/>
-              </a:rPr>
-              <a:t>Tailwind CSS</a:t>
-            </a:r>
-            <a:endParaRPr lang="en-US" sz="1150" dirty="0"/>
-          </a:p>
-        </p:txBody>
-      </p:sp>
-      <p:sp>
-        <p:nvSpPr>
-          <p:cNvPr id="14" name="Text 10"/>
-          <p:cNvSpPr/>
-          <p:nvPr/>
-        </p:nvSpPr>
-        <p:spPr>
-          <a:xfrm>
-            <a:off x="749808" y="2441448"/>
-            <a:ext cx="3383280" cy="292608"/>
-          </a:xfrm>
-          <a:prstGeom prst="rect">
-            <a:avLst/>
-          </a:prstGeom>
-          <a:noFill/>
-          <a:ln/>
-        </p:spPr>
-        <p:txBody>
-          <a:bodyPr wrap="square" rtlCol="0" anchor="ctr"/>
-          <a:lstStyle/>
-          <a:p>
-            <a:pPr indent="0" marL="0">
-              <a:buNone/>
-            </a:pPr>
-            <a:r>
-              <a:rPr lang="en-US" sz="950" dirty="0">
-                <a:solidFill>
-                  <a:srgbClr val="CBD5E1"/>
-                </a:solidFill>
-                <a:latin typeface="Calibri" pitchFamily="34" charset="0"/>
-                <a:ea typeface="Calibri" pitchFamily="34" charset="-122"/>
-                <a:cs typeface="Calibri" pitchFamily="34" charset="-120"/>
-              </a:rPr>
-              <a:t>Utility-first styling for rapid, consistent, responsive layouts</a:t>
-            </a:r>
-            <a:endParaRPr lang="en-US" sz="950" dirty="0"/>
-          </a:p>
-        </p:txBody>
-      </p:sp>
-      <p:pic>
-        <p:nvPicPr>
-          <p:cNvPr id="15" name="Image 2" descr="preencoded.png">    </p:cNvPr>
+          <p:cNvPr id="9" name="Image 0" descr="preencoded.png"/>
           <p:cNvPicPr>
             <a:picLocks noChangeAspect="1"/>
           </p:cNvPicPr>
@@ -5939,7 +5419,7 @@
         </p:blipFill>
         <p:spPr>
           <a:xfrm>
-            <a:off x="384048" y="2916936"/>
+            <a:off x="384048" y="1600200"/>
             <a:ext cx="274320" cy="274320"/>
           </a:xfrm>
           <a:prstGeom prst="rect">
@@ -5949,13 +5429,13 @@
       </p:pic>
       <p:sp>
         <p:nvSpPr>
-          <p:cNvPr id="16" name="Text 11"/>
-          <p:cNvSpPr/>
-          <p:nvPr/>
-        </p:nvSpPr>
-        <p:spPr>
-          <a:xfrm>
-            <a:off x="749808" y="2843784"/>
+          <p:cNvPr id="10" name="Text 7"/>
+          <p:cNvSpPr/>
+          <p:nvPr/>
+        </p:nvSpPr>
+        <p:spPr>
+          <a:xfrm>
+            <a:off x="749808" y="1527048"/>
             <a:ext cx="3383280" cy="256032"/>
           </a:xfrm>
           <a:prstGeom prst="rect">
@@ -5968,7 +5448,7 @@
           <a:bodyPr wrap="square" rtlCol="0" anchor="ctr"/>
           <a:lstStyle/>
           <a:p>
-            <a:pPr indent="0" marL="0">
+            <a:pPr marL="0" indent="0">
               <a:buNone/>
             </a:pPr>
             <a:r>
@@ -5980,7 +5460,7 @@
                 <a:ea typeface="Calibri" pitchFamily="34" charset="-122"/>
                 <a:cs typeface="Calibri" pitchFamily="34" charset="-120"/>
               </a:rPr>
-              <a:t>Redux Toolkit</a:t>
+              <a:t>React + Vite</a:t>
             </a:r>
             <a:endParaRPr lang="en-US" sz="1150" dirty="0"/>
           </a:p>
@@ -5988,13 +5468,13 @@
       </p:sp>
       <p:sp>
         <p:nvSpPr>
-          <p:cNvPr id="17" name="Text 12"/>
-          <p:cNvSpPr/>
-          <p:nvPr/>
-        </p:nvSpPr>
-        <p:spPr>
-          <a:xfrm>
-            <a:off x="749808" y="3099816"/>
+          <p:cNvPr id="11" name="Text 8"/>
+          <p:cNvSpPr/>
+          <p:nvPr/>
+        </p:nvSpPr>
+        <p:spPr>
+          <a:xfrm>
+            <a:off x="749808" y="1783080"/>
             <a:ext cx="3383280" cy="292608"/>
           </a:xfrm>
           <a:prstGeom prst="rect">
@@ -6007,7 +5487,7 @@
           <a:bodyPr wrap="square" rtlCol="0" anchor="ctr"/>
           <a:lstStyle/>
           <a:p>
-            <a:pPr indent="0" marL="0">
+            <a:pPr marL="0" indent="0">
               <a:buNone/>
             </a:pPr>
             <a:r>
@@ -6019,7 +5499,7 @@
                 <a:ea typeface="Calibri" pitchFamily="34" charset="-122"/>
                 <a:cs typeface="Calibri" pitchFamily="34" charset="-120"/>
               </a:rPr>
-              <a:t>Centralised state for session, chat, appointments, and payments</a:t>
+              <a:t>Component UI with fast HMR builds and optimised production output</a:t>
             </a:r>
             <a:endParaRPr lang="en-US" sz="950" dirty="0"/>
           </a:p>
@@ -6027,7 +5507,7 @@
       </p:sp>
       <p:pic>
         <p:nvPicPr>
-          <p:cNvPr id="18" name="Image 3" descr="preencoded.png">    </p:cNvPr>
+          <p:cNvPr id="12" name="Image 1" descr="preencoded.png"/>
           <p:cNvPicPr>
             <a:picLocks noChangeAspect="1"/>
           </p:cNvPicPr>
@@ -6041,7 +5521,7 @@
         </p:blipFill>
         <p:spPr>
           <a:xfrm>
-            <a:off x="384048" y="3575304"/>
+            <a:off x="384048" y="2258568"/>
             <a:ext cx="274320" cy="274320"/>
           </a:xfrm>
           <a:prstGeom prst="rect">
@@ -6051,13 +5531,13 @@
       </p:pic>
       <p:sp>
         <p:nvSpPr>
-          <p:cNvPr id="19" name="Text 13"/>
-          <p:cNvSpPr/>
-          <p:nvPr/>
-        </p:nvSpPr>
-        <p:spPr>
-          <a:xfrm>
-            <a:off x="749808" y="3502152"/>
+          <p:cNvPr id="13" name="Text 9"/>
+          <p:cNvSpPr/>
+          <p:nvPr/>
+        </p:nvSpPr>
+        <p:spPr>
+          <a:xfrm>
+            <a:off x="749808" y="2185416"/>
             <a:ext cx="3383280" cy="256032"/>
           </a:xfrm>
           <a:prstGeom prst="rect">
@@ -6070,7 +5550,7 @@
           <a:bodyPr wrap="square" rtlCol="0" anchor="ctr"/>
           <a:lstStyle/>
           <a:p>
-            <a:pPr indent="0" marL="0">
+            <a:pPr marL="0" indent="0">
               <a:buNone/>
             </a:pPr>
             <a:r>
@@ -6082,7 +5562,7 @@
                 <a:ea typeface="Calibri" pitchFamily="34" charset="-122"/>
                 <a:cs typeface="Calibri" pitchFamily="34" charset="-120"/>
               </a:rPr>
-              <a:t>Axios</a:t>
+              <a:t>Tailwind CSS</a:t>
             </a:r>
             <a:endParaRPr lang="en-US" sz="1150" dirty="0"/>
           </a:p>
@@ -6090,13 +5570,13 @@
       </p:sp>
       <p:sp>
         <p:nvSpPr>
-          <p:cNvPr id="20" name="Text 14"/>
-          <p:cNvSpPr/>
-          <p:nvPr/>
-        </p:nvSpPr>
-        <p:spPr>
-          <a:xfrm>
-            <a:off x="749808" y="3758184"/>
+          <p:cNvPr id="14" name="Text 10"/>
+          <p:cNvSpPr/>
+          <p:nvPr/>
+        </p:nvSpPr>
+        <p:spPr>
+          <a:xfrm>
+            <a:off x="749808" y="2441448"/>
             <a:ext cx="3383280" cy="292608"/>
           </a:xfrm>
           <a:prstGeom prst="rect">
@@ -6109,7 +5589,7 @@
           <a:bodyPr wrap="square" rtlCol="0" anchor="ctr"/>
           <a:lstStyle/>
           <a:p>
-            <a:pPr indent="0" marL="0">
+            <a:pPr marL="0" indent="0">
               <a:buNone/>
             </a:pPr>
             <a:r>
@@ -6121,7 +5601,7 @@
                 <a:ea typeface="Calibri" pitchFamily="34" charset="-122"/>
                 <a:cs typeface="Calibri" pitchFamily="34" charset="-120"/>
               </a:rPr>
-              <a:t>Interceptor-based HTTP client for clean, role-aware API calls</a:t>
+              <a:t>Utility-first styling for rapid, consistent, responsive layouts</a:t>
             </a:r>
             <a:endParaRPr lang="en-US" sz="950" dirty="0"/>
           </a:p>
@@ -6129,7 +5609,7 @@
       </p:sp>
       <p:pic>
         <p:nvPicPr>
-          <p:cNvPr id="21" name="Image 4" descr="preencoded.png">    </p:cNvPr>
+          <p:cNvPr id="15" name="Image 2" descr="preencoded.png"/>
           <p:cNvPicPr>
             <a:picLocks noChangeAspect="1"/>
           </p:cNvPicPr>
@@ -6143,6 +5623,210 @@
         </p:blipFill>
         <p:spPr>
           <a:xfrm>
+            <a:off x="384048" y="2916936"/>
+            <a:ext cx="274320" cy="274320"/>
+          </a:xfrm>
+          <a:prstGeom prst="rect">
+            <a:avLst/>
+          </a:prstGeom>
+        </p:spPr>
+      </p:pic>
+      <p:sp>
+        <p:nvSpPr>
+          <p:cNvPr id="16" name="Text 11"/>
+          <p:cNvSpPr/>
+          <p:nvPr/>
+        </p:nvSpPr>
+        <p:spPr>
+          <a:xfrm>
+            <a:off x="749808" y="2843784"/>
+            <a:ext cx="3383280" cy="256032"/>
+          </a:xfrm>
+          <a:prstGeom prst="rect">
+            <a:avLst/>
+          </a:prstGeom>
+          <a:noFill/>
+          <a:ln/>
+        </p:spPr>
+        <p:txBody>
+          <a:bodyPr wrap="square" rtlCol="0" anchor="ctr"/>
+          <a:lstStyle/>
+          <a:p>
+            <a:pPr marL="0" indent="0">
+              <a:buNone/>
+            </a:pPr>
+            <a:r>
+              <a:rPr lang="en-US" sz="1150" b="1" dirty="0">
+                <a:solidFill>
+                  <a:srgbClr val="FFFFFF"/>
+                </a:solidFill>
+                <a:latin typeface="Calibri" pitchFamily="34" charset="0"/>
+                <a:ea typeface="Calibri" pitchFamily="34" charset="-122"/>
+                <a:cs typeface="Calibri" pitchFamily="34" charset="-120"/>
+              </a:rPr>
+              <a:t>Redux Toolkit</a:t>
+            </a:r>
+            <a:endParaRPr lang="en-US" sz="1150" dirty="0"/>
+          </a:p>
+        </p:txBody>
+      </p:sp>
+      <p:sp>
+        <p:nvSpPr>
+          <p:cNvPr id="17" name="Text 12"/>
+          <p:cNvSpPr/>
+          <p:nvPr/>
+        </p:nvSpPr>
+        <p:spPr>
+          <a:xfrm>
+            <a:off x="749808" y="3099816"/>
+            <a:ext cx="3383280" cy="292608"/>
+          </a:xfrm>
+          <a:prstGeom prst="rect">
+            <a:avLst/>
+          </a:prstGeom>
+          <a:noFill/>
+          <a:ln/>
+        </p:spPr>
+        <p:txBody>
+          <a:bodyPr wrap="square" rtlCol="0" anchor="ctr"/>
+          <a:lstStyle/>
+          <a:p>
+            <a:pPr marL="0" indent="0">
+              <a:buNone/>
+            </a:pPr>
+            <a:r>
+              <a:rPr lang="en-US" sz="950" dirty="0">
+                <a:solidFill>
+                  <a:srgbClr val="CBD5E1"/>
+                </a:solidFill>
+                <a:latin typeface="Calibri" pitchFamily="34" charset="0"/>
+                <a:ea typeface="Calibri" pitchFamily="34" charset="-122"/>
+                <a:cs typeface="Calibri" pitchFamily="34" charset="-120"/>
+              </a:rPr>
+              <a:t>Centralised state for session, chat, appointments, and payments</a:t>
+            </a:r>
+            <a:endParaRPr lang="en-US" sz="950" dirty="0"/>
+          </a:p>
+        </p:txBody>
+      </p:sp>
+      <p:pic>
+        <p:nvPicPr>
+          <p:cNvPr id="18" name="Image 3" descr="preencoded.png"/>
+          <p:cNvPicPr>
+            <a:picLocks noChangeAspect="1"/>
+          </p:cNvPicPr>
+          <p:nvPr/>
+        </p:nvPicPr>
+        <p:blipFill>
+          <a:blip r:embed="rId6"/>
+          <a:stretch>
+            <a:fillRect/>
+          </a:stretch>
+        </p:blipFill>
+        <p:spPr>
+          <a:xfrm>
+            <a:off x="384048" y="3575304"/>
+            <a:ext cx="274320" cy="274320"/>
+          </a:xfrm>
+          <a:prstGeom prst="rect">
+            <a:avLst/>
+          </a:prstGeom>
+        </p:spPr>
+      </p:pic>
+      <p:sp>
+        <p:nvSpPr>
+          <p:cNvPr id="19" name="Text 13"/>
+          <p:cNvSpPr/>
+          <p:nvPr/>
+        </p:nvSpPr>
+        <p:spPr>
+          <a:xfrm>
+            <a:off x="749808" y="3502152"/>
+            <a:ext cx="3383280" cy="256032"/>
+          </a:xfrm>
+          <a:prstGeom prst="rect">
+            <a:avLst/>
+          </a:prstGeom>
+          <a:noFill/>
+          <a:ln/>
+        </p:spPr>
+        <p:txBody>
+          <a:bodyPr wrap="square" rtlCol="0" anchor="ctr"/>
+          <a:lstStyle/>
+          <a:p>
+            <a:pPr marL="0" indent="0">
+              <a:buNone/>
+            </a:pPr>
+            <a:r>
+              <a:rPr lang="en-US" sz="1150" b="1" dirty="0">
+                <a:solidFill>
+                  <a:srgbClr val="FFFFFF"/>
+                </a:solidFill>
+                <a:latin typeface="Calibri" pitchFamily="34" charset="0"/>
+                <a:ea typeface="Calibri" pitchFamily="34" charset="-122"/>
+                <a:cs typeface="Calibri" pitchFamily="34" charset="-120"/>
+              </a:rPr>
+              <a:t>Axios</a:t>
+            </a:r>
+            <a:endParaRPr lang="en-US" sz="1150" dirty="0"/>
+          </a:p>
+        </p:txBody>
+      </p:sp>
+      <p:sp>
+        <p:nvSpPr>
+          <p:cNvPr id="20" name="Text 14"/>
+          <p:cNvSpPr/>
+          <p:nvPr/>
+        </p:nvSpPr>
+        <p:spPr>
+          <a:xfrm>
+            <a:off x="749808" y="3758184"/>
+            <a:ext cx="3383280" cy="292608"/>
+          </a:xfrm>
+          <a:prstGeom prst="rect">
+            <a:avLst/>
+          </a:prstGeom>
+          <a:noFill/>
+          <a:ln/>
+        </p:spPr>
+        <p:txBody>
+          <a:bodyPr wrap="square" rtlCol="0" anchor="ctr"/>
+          <a:lstStyle/>
+          <a:p>
+            <a:pPr marL="0" indent="0">
+              <a:buNone/>
+            </a:pPr>
+            <a:r>
+              <a:rPr lang="en-US" sz="950" dirty="0">
+                <a:solidFill>
+                  <a:srgbClr val="CBD5E1"/>
+                </a:solidFill>
+                <a:latin typeface="Calibri" pitchFamily="34" charset="0"/>
+                <a:ea typeface="Calibri" pitchFamily="34" charset="-122"/>
+                <a:cs typeface="Calibri" pitchFamily="34" charset="-120"/>
+              </a:rPr>
+              <a:t>Interceptor-based HTTP client for clean, role-aware API calls</a:t>
+            </a:r>
+            <a:endParaRPr lang="en-US" sz="950" dirty="0"/>
+          </a:p>
+        </p:txBody>
+      </p:sp>
+      <p:pic>
+        <p:nvPicPr>
+          <p:cNvPr id="21" name="Image 4" descr="preencoded.png"/>
+          <p:cNvPicPr>
+            <a:picLocks noChangeAspect="1"/>
+          </p:cNvPicPr>
+          <p:nvPr/>
+        </p:nvPicPr>
+        <p:blipFill>
+          <a:blip r:embed="rId7"/>
+          <a:stretch>
+            <a:fillRect/>
+          </a:stretch>
+        </p:blipFill>
+        <p:spPr>
+          <a:xfrm>
             <a:off x="384048" y="4233672"/>
             <a:ext cx="274320" cy="274320"/>
           </a:xfrm>
@@ -6172,7 +5856,7 @@
           <a:bodyPr wrap="square" rtlCol="0" anchor="ctr"/>
           <a:lstStyle/>
           <a:p>
-            <a:pPr indent="0" marL="0">
+            <a:pPr marL="0" indent="0">
               <a:buNone/>
             </a:pPr>
             <a:r>
@@ -6211,7 +5895,7 @@
           <a:bodyPr wrap="square" rtlCol="0" anchor="ctr"/>
           <a:lstStyle/>
           <a:p>
-            <a:pPr indent="0" marL="0">
+            <a:pPr marL="0" indent="0">
               <a:buNone/>
             </a:pPr>
             <a:r>
@@ -6300,7 +5984,7 @@
           <a:bodyPr wrap="square" rtlCol="0" anchor="ctr"/>
           <a:lstStyle/>
           <a:p>
-            <a:pPr indent="0" marL="0">
+            <a:pPr marL="0" indent="0">
               <a:buNone/>
             </a:pPr>
             <a:r>
@@ -6320,14 +6004,14 @@
       </p:sp>
       <p:pic>
         <p:nvPicPr>
-          <p:cNvPr id="27" name="Image 5" descr="preencoded.png">    </p:cNvPr>
+          <p:cNvPr id="27" name="Image 5" descr="preencoded.png"/>
           <p:cNvPicPr>
             <a:picLocks noChangeAspect="1"/>
           </p:cNvPicPr>
           <p:nvPr/>
         </p:nvPicPr>
         <p:blipFill>
-          <a:blip r:embed="rId6"/>
+          <a:blip r:embed="rId8"/>
           <a:stretch>
             <a:fillRect/>
           </a:stretch>
@@ -6363,7 +6047,7 @@
           <a:bodyPr wrap="square" rtlCol="0" anchor="ctr"/>
           <a:lstStyle/>
           <a:p>
-            <a:pPr indent="0" marL="0">
+            <a:pPr marL="0" indent="0">
               <a:buNone/>
             </a:pPr>
             <a:r>
@@ -6402,7 +6086,7 @@
           <a:bodyPr wrap="square" rtlCol="0" anchor="ctr"/>
           <a:lstStyle/>
           <a:p>
-            <a:pPr indent="0" marL="0">
+            <a:pPr marL="0" indent="0">
               <a:buNone/>
             </a:pPr>
             <a:r>
@@ -6422,7 +6106,313 @@
       </p:sp>
       <p:pic>
         <p:nvPicPr>
-          <p:cNvPr id="30" name="Image 6" descr="preencoded.png">    </p:cNvPr>
+          <p:cNvPr id="30" name="Image 6" descr="preencoded.png"/>
+          <p:cNvPicPr>
+            <a:picLocks noChangeAspect="1"/>
+          </p:cNvPicPr>
+          <p:nvPr/>
+        </p:nvPicPr>
+        <p:blipFill>
+          <a:blip r:embed="rId9"/>
+          <a:stretch>
+            <a:fillRect/>
+          </a:stretch>
+        </p:blipFill>
+        <p:spPr>
+          <a:xfrm>
+            <a:off x="4645152" y="2258568"/>
+            <a:ext cx="274320" cy="274320"/>
+          </a:xfrm>
+          <a:prstGeom prst="rect">
+            <a:avLst/>
+          </a:prstGeom>
+        </p:spPr>
+      </p:pic>
+      <p:sp>
+        <p:nvSpPr>
+          <p:cNvPr id="31" name="Text 22"/>
+          <p:cNvSpPr/>
+          <p:nvPr/>
+        </p:nvSpPr>
+        <p:spPr>
+          <a:xfrm>
+            <a:off x="5010912" y="2185416"/>
+            <a:ext cx="3749040" cy="256032"/>
+          </a:xfrm>
+          <a:prstGeom prst="rect">
+            <a:avLst/>
+          </a:prstGeom>
+          <a:noFill/>
+          <a:ln/>
+        </p:spPr>
+        <p:txBody>
+          <a:bodyPr wrap="square" rtlCol="0" anchor="ctr"/>
+          <a:lstStyle/>
+          <a:p>
+            <a:pPr marL="0" indent="0">
+              <a:buNone/>
+            </a:pPr>
+            <a:r>
+              <a:rPr lang="en-US" sz="1150" b="1" dirty="0">
+                <a:solidFill>
+                  <a:srgbClr val="FFFFFF"/>
+                </a:solidFill>
+                <a:latin typeface="Calibri" pitchFamily="34" charset="0"/>
+                <a:ea typeface="Calibri" pitchFamily="34" charset="-122"/>
+                <a:cs typeface="Calibri" pitchFamily="34" charset="-120"/>
+              </a:rPr>
+              <a:t>Express.js</a:t>
+            </a:r>
+            <a:endParaRPr lang="en-US" sz="1150" dirty="0"/>
+          </a:p>
+        </p:txBody>
+      </p:sp>
+      <p:sp>
+        <p:nvSpPr>
+          <p:cNvPr id="32" name="Text 23"/>
+          <p:cNvSpPr/>
+          <p:nvPr/>
+        </p:nvSpPr>
+        <p:spPr>
+          <a:xfrm>
+            <a:off x="5010912" y="2441448"/>
+            <a:ext cx="3749040" cy="292608"/>
+          </a:xfrm>
+          <a:prstGeom prst="rect">
+            <a:avLst/>
+          </a:prstGeom>
+          <a:noFill/>
+          <a:ln/>
+        </p:spPr>
+        <p:txBody>
+          <a:bodyPr wrap="square" rtlCol="0" anchor="ctr"/>
+          <a:lstStyle/>
+          <a:p>
+            <a:pPr marL="0" indent="0">
+              <a:buNone/>
+            </a:pPr>
+            <a:r>
+              <a:rPr lang="en-US" sz="950" dirty="0">
+                <a:solidFill>
+                  <a:srgbClr val="CBD5E1"/>
+                </a:solidFill>
+                <a:latin typeface="Calibri" pitchFamily="34" charset="0"/>
+                <a:ea typeface="Calibri" pitchFamily="34" charset="-122"/>
+                <a:cs typeface="Calibri" pitchFamily="34" charset="-120"/>
+              </a:rPr>
+              <a:t>Lightweight REST API framework with clean middleware chains</a:t>
+            </a:r>
+            <a:endParaRPr lang="en-US" sz="950" dirty="0"/>
+          </a:p>
+        </p:txBody>
+      </p:sp>
+      <p:pic>
+        <p:nvPicPr>
+          <p:cNvPr id="33" name="Image 7" descr="preencoded.png"/>
+          <p:cNvPicPr>
+            <a:picLocks noChangeAspect="1"/>
+          </p:cNvPicPr>
+          <p:nvPr/>
+        </p:nvPicPr>
+        <p:blipFill>
+          <a:blip r:embed="rId10"/>
+          <a:stretch>
+            <a:fillRect/>
+          </a:stretch>
+        </p:blipFill>
+        <p:spPr>
+          <a:xfrm>
+            <a:off x="4645152" y="2916936"/>
+            <a:ext cx="274320" cy="274320"/>
+          </a:xfrm>
+          <a:prstGeom prst="rect">
+            <a:avLst/>
+          </a:prstGeom>
+        </p:spPr>
+      </p:pic>
+      <p:sp>
+        <p:nvSpPr>
+          <p:cNvPr id="34" name="Text 24"/>
+          <p:cNvSpPr/>
+          <p:nvPr/>
+        </p:nvSpPr>
+        <p:spPr>
+          <a:xfrm>
+            <a:off x="5010912" y="2843784"/>
+            <a:ext cx="3749040" cy="256032"/>
+          </a:xfrm>
+          <a:prstGeom prst="rect">
+            <a:avLst/>
+          </a:prstGeom>
+          <a:noFill/>
+          <a:ln/>
+        </p:spPr>
+        <p:txBody>
+          <a:bodyPr wrap="square" rtlCol="0" anchor="ctr"/>
+          <a:lstStyle/>
+          <a:p>
+            <a:pPr marL="0" indent="0">
+              <a:buNone/>
+            </a:pPr>
+            <a:r>
+              <a:rPr lang="en-US" sz="1150" b="1" dirty="0">
+                <a:solidFill>
+                  <a:srgbClr val="FFFFFF"/>
+                </a:solidFill>
+                <a:latin typeface="Calibri" pitchFamily="34" charset="0"/>
+                <a:ea typeface="Calibri" pitchFamily="34" charset="-122"/>
+                <a:cs typeface="Calibri" pitchFamily="34" charset="-120"/>
+              </a:rPr>
+              <a:t>MongoDB + Mongoose</a:t>
+            </a:r>
+            <a:endParaRPr lang="en-US" sz="1150" dirty="0"/>
+          </a:p>
+        </p:txBody>
+      </p:sp>
+      <p:sp>
+        <p:nvSpPr>
+          <p:cNvPr id="35" name="Text 25"/>
+          <p:cNvSpPr/>
+          <p:nvPr/>
+        </p:nvSpPr>
+        <p:spPr>
+          <a:xfrm>
+            <a:off x="5010912" y="3099816"/>
+            <a:ext cx="3749040" cy="292608"/>
+          </a:xfrm>
+          <a:prstGeom prst="rect">
+            <a:avLst/>
+          </a:prstGeom>
+          <a:noFill/>
+          <a:ln/>
+        </p:spPr>
+        <p:txBody>
+          <a:bodyPr wrap="square" rtlCol="0" anchor="ctr"/>
+          <a:lstStyle/>
+          <a:p>
+            <a:pPr marL="0" indent="0">
+              <a:buNone/>
+            </a:pPr>
+            <a:r>
+              <a:rPr lang="en-US" sz="950" dirty="0">
+                <a:solidFill>
+                  <a:srgbClr val="CBD5E1"/>
+                </a:solidFill>
+                <a:latin typeface="Calibri" pitchFamily="34" charset="0"/>
+                <a:ea typeface="Calibri" pitchFamily="34" charset="-122"/>
+                <a:cs typeface="Calibri" pitchFamily="34" charset="-120"/>
+              </a:rPr>
+              <a:t>NoSQL document DB with schema validation and model relationships</a:t>
+            </a:r>
+            <a:endParaRPr lang="en-US" sz="950" dirty="0"/>
+          </a:p>
+        </p:txBody>
+      </p:sp>
+      <p:pic>
+        <p:nvPicPr>
+          <p:cNvPr id="36" name="Image 8" descr="preencoded.png"/>
+          <p:cNvPicPr>
+            <a:picLocks noChangeAspect="1"/>
+          </p:cNvPicPr>
+          <p:nvPr/>
+        </p:nvPicPr>
+        <p:blipFill>
+          <a:blip r:embed="rId11"/>
+          <a:stretch>
+            <a:fillRect/>
+          </a:stretch>
+        </p:blipFill>
+        <p:spPr>
+          <a:xfrm>
+            <a:off x="4645152" y="3575304"/>
+            <a:ext cx="274320" cy="274320"/>
+          </a:xfrm>
+          <a:prstGeom prst="rect">
+            <a:avLst/>
+          </a:prstGeom>
+        </p:spPr>
+      </p:pic>
+      <p:sp>
+        <p:nvSpPr>
+          <p:cNvPr id="37" name="Text 26"/>
+          <p:cNvSpPr/>
+          <p:nvPr/>
+        </p:nvSpPr>
+        <p:spPr>
+          <a:xfrm>
+            <a:off x="5010912" y="3502152"/>
+            <a:ext cx="3749040" cy="256032"/>
+          </a:xfrm>
+          <a:prstGeom prst="rect">
+            <a:avLst/>
+          </a:prstGeom>
+          <a:noFill/>
+          <a:ln/>
+        </p:spPr>
+        <p:txBody>
+          <a:bodyPr wrap="square" rtlCol="0" anchor="ctr"/>
+          <a:lstStyle/>
+          <a:p>
+            <a:pPr marL="0" indent="0">
+              <a:buNone/>
+            </a:pPr>
+            <a:r>
+              <a:rPr lang="en-US" sz="1150" b="1" dirty="0">
+                <a:solidFill>
+                  <a:srgbClr val="FFFFFF"/>
+                </a:solidFill>
+                <a:latin typeface="Calibri" pitchFamily="34" charset="0"/>
+                <a:ea typeface="Calibri" pitchFamily="34" charset="-122"/>
+                <a:cs typeface="Calibri" pitchFamily="34" charset="-120"/>
+              </a:rPr>
+              <a:t>JWT Auth + bcrypt</a:t>
+            </a:r>
+            <a:endParaRPr lang="en-US" sz="1150" dirty="0"/>
+          </a:p>
+        </p:txBody>
+      </p:sp>
+      <p:sp>
+        <p:nvSpPr>
+          <p:cNvPr id="38" name="Text 27"/>
+          <p:cNvSpPr/>
+          <p:nvPr/>
+        </p:nvSpPr>
+        <p:spPr>
+          <a:xfrm>
+            <a:off x="5010912" y="3758184"/>
+            <a:ext cx="3749040" cy="292608"/>
+          </a:xfrm>
+          <a:prstGeom prst="rect">
+            <a:avLst/>
+          </a:prstGeom>
+          <a:noFill/>
+          <a:ln/>
+        </p:spPr>
+        <p:txBody>
+          <a:bodyPr wrap="square" rtlCol="0" anchor="ctr"/>
+          <a:lstStyle/>
+          <a:p>
+            <a:pPr marL="0" indent="0">
+              <a:buNone/>
+            </a:pPr>
+            <a:r>
+              <a:rPr lang="en-US" sz="950" dirty="0">
+                <a:solidFill>
+                  <a:srgbClr val="CBD5E1"/>
+                </a:solidFill>
+                <a:latin typeface="Calibri" pitchFamily="34" charset="0"/>
+                <a:ea typeface="Calibri" pitchFamily="34" charset="-122"/>
+                <a:cs typeface="Calibri" pitchFamily="34" charset="-120"/>
+              </a:rPr>
+              <a:t>Stateless role-based tokens; bcrypt hashing for secure credentials</a:t>
+            </a:r>
+            <a:endParaRPr lang="en-US" sz="950" dirty="0"/>
+          </a:p>
+        </p:txBody>
+      </p:sp>
+      <p:pic>
+        <p:nvPicPr>
+          <p:cNvPr id="39" name="Image 9" descr="preencoded.png"/>
           <p:cNvPicPr>
             <a:picLocks noChangeAspect="1"/>
           </p:cNvPicPr>
@@ -6436,312 +6426,6 @@
         </p:blipFill>
         <p:spPr>
           <a:xfrm>
-            <a:off x="4645152" y="2258568"/>
-            <a:ext cx="274320" cy="274320"/>
-          </a:xfrm>
-          <a:prstGeom prst="rect">
-            <a:avLst/>
-          </a:prstGeom>
-        </p:spPr>
-      </p:pic>
-      <p:sp>
-        <p:nvSpPr>
-          <p:cNvPr id="31" name="Text 22"/>
-          <p:cNvSpPr/>
-          <p:nvPr/>
-        </p:nvSpPr>
-        <p:spPr>
-          <a:xfrm>
-            <a:off x="5010912" y="2185416"/>
-            <a:ext cx="3749040" cy="256032"/>
-          </a:xfrm>
-          <a:prstGeom prst="rect">
-            <a:avLst/>
-          </a:prstGeom>
-          <a:noFill/>
-          <a:ln/>
-        </p:spPr>
-        <p:txBody>
-          <a:bodyPr wrap="square" rtlCol="0" anchor="ctr"/>
-          <a:lstStyle/>
-          <a:p>
-            <a:pPr indent="0" marL="0">
-              <a:buNone/>
-            </a:pPr>
-            <a:r>
-              <a:rPr lang="en-US" sz="1150" b="1" dirty="0">
-                <a:solidFill>
-                  <a:srgbClr val="FFFFFF"/>
-                </a:solidFill>
-                <a:latin typeface="Calibri" pitchFamily="34" charset="0"/>
-                <a:ea typeface="Calibri" pitchFamily="34" charset="-122"/>
-                <a:cs typeface="Calibri" pitchFamily="34" charset="-120"/>
-              </a:rPr>
-              <a:t>Express.js</a:t>
-            </a:r>
-            <a:endParaRPr lang="en-US" sz="1150" dirty="0"/>
-          </a:p>
-        </p:txBody>
-      </p:sp>
-      <p:sp>
-        <p:nvSpPr>
-          <p:cNvPr id="32" name="Text 23"/>
-          <p:cNvSpPr/>
-          <p:nvPr/>
-        </p:nvSpPr>
-        <p:spPr>
-          <a:xfrm>
-            <a:off x="5010912" y="2441448"/>
-            <a:ext cx="3749040" cy="292608"/>
-          </a:xfrm>
-          <a:prstGeom prst="rect">
-            <a:avLst/>
-          </a:prstGeom>
-          <a:noFill/>
-          <a:ln/>
-        </p:spPr>
-        <p:txBody>
-          <a:bodyPr wrap="square" rtlCol="0" anchor="ctr"/>
-          <a:lstStyle/>
-          <a:p>
-            <a:pPr indent="0" marL="0">
-              <a:buNone/>
-            </a:pPr>
-            <a:r>
-              <a:rPr lang="en-US" sz="950" dirty="0">
-                <a:solidFill>
-                  <a:srgbClr val="CBD5E1"/>
-                </a:solidFill>
-                <a:latin typeface="Calibri" pitchFamily="34" charset="0"/>
-                <a:ea typeface="Calibri" pitchFamily="34" charset="-122"/>
-                <a:cs typeface="Calibri" pitchFamily="34" charset="-120"/>
-              </a:rPr>
-              <a:t>Lightweight REST API framework with clean middleware chains</a:t>
-            </a:r>
-            <a:endParaRPr lang="en-US" sz="950" dirty="0"/>
-          </a:p>
-        </p:txBody>
-      </p:sp>
-      <p:pic>
-        <p:nvPicPr>
-          <p:cNvPr id="33" name="Image 7" descr="preencoded.png">    </p:cNvPr>
-          <p:cNvPicPr>
-            <a:picLocks noChangeAspect="1"/>
-          </p:cNvPicPr>
-          <p:nvPr/>
-        </p:nvPicPr>
-        <p:blipFill>
-          <a:blip r:embed="rId8"/>
-          <a:stretch>
-            <a:fillRect/>
-          </a:stretch>
-        </p:blipFill>
-        <p:spPr>
-          <a:xfrm>
-            <a:off x="4645152" y="2916936"/>
-            <a:ext cx="274320" cy="274320"/>
-          </a:xfrm>
-          <a:prstGeom prst="rect">
-            <a:avLst/>
-          </a:prstGeom>
-        </p:spPr>
-      </p:pic>
-      <p:sp>
-        <p:nvSpPr>
-          <p:cNvPr id="34" name="Text 24"/>
-          <p:cNvSpPr/>
-          <p:nvPr/>
-        </p:nvSpPr>
-        <p:spPr>
-          <a:xfrm>
-            <a:off x="5010912" y="2843784"/>
-            <a:ext cx="3749040" cy="256032"/>
-          </a:xfrm>
-          <a:prstGeom prst="rect">
-            <a:avLst/>
-          </a:prstGeom>
-          <a:noFill/>
-          <a:ln/>
-        </p:spPr>
-        <p:txBody>
-          <a:bodyPr wrap="square" rtlCol="0" anchor="ctr"/>
-          <a:lstStyle/>
-          <a:p>
-            <a:pPr indent="0" marL="0">
-              <a:buNone/>
-            </a:pPr>
-            <a:r>
-              <a:rPr lang="en-US" sz="1150" b="1" dirty="0">
-                <a:solidFill>
-                  <a:srgbClr val="FFFFFF"/>
-                </a:solidFill>
-                <a:latin typeface="Calibri" pitchFamily="34" charset="0"/>
-                <a:ea typeface="Calibri" pitchFamily="34" charset="-122"/>
-                <a:cs typeface="Calibri" pitchFamily="34" charset="-120"/>
-              </a:rPr>
-              <a:t>MongoDB + Mongoose</a:t>
-            </a:r>
-            <a:endParaRPr lang="en-US" sz="1150" dirty="0"/>
-          </a:p>
-        </p:txBody>
-      </p:sp>
-      <p:sp>
-        <p:nvSpPr>
-          <p:cNvPr id="35" name="Text 25"/>
-          <p:cNvSpPr/>
-          <p:nvPr/>
-        </p:nvSpPr>
-        <p:spPr>
-          <a:xfrm>
-            <a:off x="5010912" y="3099816"/>
-            <a:ext cx="3749040" cy="292608"/>
-          </a:xfrm>
-          <a:prstGeom prst="rect">
-            <a:avLst/>
-          </a:prstGeom>
-          <a:noFill/>
-          <a:ln/>
-        </p:spPr>
-        <p:txBody>
-          <a:bodyPr wrap="square" rtlCol="0" anchor="ctr"/>
-          <a:lstStyle/>
-          <a:p>
-            <a:pPr indent="0" marL="0">
-              <a:buNone/>
-            </a:pPr>
-            <a:r>
-              <a:rPr lang="en-US" sz="950" dirty="0">
-                <a:solidFill>
-                  <a:srgbClr val="CBD5E1"/>
-                </a:solidFill>
-                <a:latin typeface="Calibri" pitchFamily="34" charset="0"/>
-                <a:ea typeface="Calibri" pitchFamily="34" charset="-122"/>
-                <a:cs typeface="Calibri" pitchFamily="34" charset="-120"/>
-              </a:rPr>
-              <a:t>NoSQL document DB with schema validation and model relationships</a:t>
-            </a:r>
-            <a:endParaRPr lang="en-US" sz="950" dirty="0"/>
-          </a:p>
-        </p:txBody>
-      </p:sp>
-      <p:pic>
-        <p:nvPicPr>
-          <p:cNvPr id="36" name="Image 8" descr="preencoded.png">    </p:cNvPr>
-          <p:cNvPicPr>
-            <a:picLocks noChangeAspect="1"/>
-          </p:cNvPicPr>
-          <p:nvPr/>
-        </p:nvPicPr>
-        <p:blipFill>
-          <a:blip r:embed="rId9"/>
-          <a:stretch>
-            <a:fillRect/>
-          </a:stretch>
-        </p:blipFill>
-        <p:spPr>
-          <a:xfrm>
-            <a:off x="4645152" y="3575304"/>
-            <a:ext cx="274320" cy="274320"/>
-          </a:xfrm>
-          <a:prstGeom prst="rect">
-            <a:avLst/>
-          </a:prstGeom>
-        </p:spPr>
-      </p:pic>
-      <p:sp>
-        <p:nvSpPr>
-          <p:cNvPr id="37" name="Text 26"/>
-          <p:cNvSpPr/>
-          <p:nvPr/>
-        </p:nvSpPr>
-        <p:spPr>
-          <a:xfrm>
-            <a:off x="5010912" y="3502152"/>
-            <a:ext cx="3749040" cy="256032"/>
-          </a:xfrm>
-          <a:prstGeom prst="rect">
-            <a:avLst/>
-          </a:prstGeom>
-          <a:noFill/>
-          <a:ln/>
-        </p:spPr>
-        <p:txBody>
-          <a:bodyPr wrap="square" rtlCol="0" anchor="ctr"/>
-          <a:lstStyle/>
-          <a:p>
-            <a:pPr indent="0" marL="0">
-              <a:buNone/>
-            </a:pPr>
-            <a:r>
-              <a:rPr lang="en-US" sz="1150" b="1" dirty="0">
-                <a:solidFill>
-                  <a:srgbClr val="FFFFFF"/>
-                </a:solidFill>
-                <a:latin typeface="Calibri" pitchFamily="34" charset="0"/>
-                <a:ea typeface="Calibri" pitchFamily="34" charset="-122"/>
-                <a:cs typeface="Calibri" pitchFamily="34" charset="-120"/>
-              </a:rPr>
-              <a:t>JWT Auth + bcrypt</a:t>
-            </a:r>
-            <a:endParaRPr lang="en-US" sz="1150" dirty="0"/>
-          </a:p>
-        </p:txBody>
-      </p:sp>
-      <p:sp>
-        <p:nvSpPr>
-          <p:cNvPr id="38" name="Text 27"/>
-          <p:cNvSpPr/>
-          <p:nvPr/>
-        </p:nvSpPr>
-        <p:spPr>
-          <a:xfrm>
-            <a:off x="5010912" y="3758184"/>
-            <a:ext cx="3749040" cy="292608"/>
-          </a:xfrm>
-          <a:prstGeom prst="rect">
-            <a:avLst/>
-          </a:prstGeom>
-          <a:noFill/>
-          <a:ln/>
-        </p:spPr>
-        <p:txBody>
-          <a:bodyPr wrap="square" rtlCol="0" anchor="ctr"/>
-          <a:lstStyle/>
-          <a:p>
-            <a:pPr indent="0" marL="0">
-              <a:buNone/>
-            </a:pPr>
-            <a:r>
-              <a:rPr lang="en-US" sz="950" dirty="0">
-                <a:solidFill>
-                  <a:srgbClr val="CBD5E1"/>
-                </a:solidFill>
-                <a:latin typeface="Calibri" pitchFamily="34" charset="0"/>
-                <a:ea typeface="Calibri" pitchFamily="34" charset="-122"/>
-                <a:cs typeface="Calibri" pitchFamily="34" charset="-120"/>
-              </a:rPr>
-              <a:t>Stateless role-based tokens; bcrypt hashing for secure credentials</a:t>
-            </a:r>
-            <a:endParaRPr lang="en-US" sz="950" dirty="0"/>
-          </a:p>
-        </p:txBody>
-      </p:sp>
-      <p:pic>
-        <p:nvPicPr>
-          <p:cNvPr id="39" name="Image 9" descr="preencoded.png">    </p:cNvPr>
-          <p:cNvPicPr>
-            <a:picLocks noChangeAspect="1"/>
-          </p:cNvPicPr>
-          <p:nvPr/>
-        </p:nvPicPr>
-        <p:blipFill>
-          <a:blip r:embed="rId10"/>
-          <a:stretch>
-            <a:fillRect/>
-          </a:stretch>
-        </p:blipFill>
-        <p:spPr>
-          <a:xfrm>
             <a:off x="4645152" y="4233672"/>
             <a:ext cx="274320" cy="274320"/>
           </a:xfrm>
@@ -6771,7 +6455,7 @@
           <a:bodyPr wrap="square" rtlCol="0" anchor="ctr"/>
           <a:lstStyle/>
           <a:p>
-            <a:pPr indent="0" marL="0">
+            <a:pPr marL="0" indent="0">
               <a:buNone/>
             </a:pPr>
             <a:r>
@@ -6810,7 +6494,7 @@
           <a:bodyPr wrap="square" rtlCol="0" anchor="ctr"/>
           <a:lstStyle/>
           <a:p>
-            <a:pPr indent="0" marL="0">
+            <a:pPr marL="0" indent="0">
               <a:buNone/>
             </a:pPr>
             <a:r>
@@ -6844,6 +6528,7 @@
         <a:solidFill>
           <a:srgbClr val="F8FAFC"/>
         </a:solidFill>
+        <a:effectLst/>
       </p:bgPr>
     </p:bg>
     <p:spTree>
@@ -6931,7 +6616,7 @@
           <a:bodyPr wrap="square" rtlCol="0" anchor="ctr"/>
           <a:lstStyle/>
           <a:p>
-            <a:pPr indent="0" marL="0">
+            <a:pPr marL="0" indent="0">
               <a:buNone/>
             </a:pPr>
             <a:r>
@@ -6970,7 +6655,7 @@
           <a:bodyPr wrap="square" rtlCol="0" anchor="ctr"/>
           <a:lstStyle/>
           <a:p>
-            <a:pPr algn="r" indent="0" marL="0">
+            <a:pPr marL="0" indent="0" algn="r">
               <a:buNone/>
             </a:pPr>
             <a:r>
@@ -7009,7 +6694,7 @@
             <a:prstDash val="solid"/>
           </a:ln>
           <a:effectLst>
-            <a:outerShdw sx="100000" sy="100000" kx="0" ky="0" algn="bl" rotWithShape="0" blurRad="101600" dist="38100" dir="8100000">
+            <a:outerShdw blurRad="101600" dist="38100" dir="8100000" algn="bl" rotWithShape="0">
               <a:srgbClr val="000000">
                 <a:alpha val="18000"/>
               </a:srgbClr>
@@ -7063,7 +6748,7 @@
           <a:bodyPr wrap="square" lIns="0" tIns="0" rIns="0" bIns="0" rtlCol="0" anchor="ctr"/>
           <a:lstStyle/>
           <a:p>
-            <a:pPr algn="ctr" indent="0" marL="0">
+            <a:pPr marL="0" indent="0" algn="ctr">
               <a:buNone/>
             </a:pPr>
             <a:r>
@@ -7099,7 +6784,7 @@
           <a:bodyPr wrap="square" rtlCol="0" anchor="ctr"/>
           <a:lstStyle/>
           <a:p>
-            <a:pPr algn="ctr" indent="0" marL="0">
+            <a:pPr marL="0" indent="0" algn="ctr">
               <a:buNone/>
             </a:pPr>
             <a:r>
@@ -7138,7 +6823,7 @@
           <a:bodyPr wrap="square" rtlCol="0" anchor="ctr"/>
           <a:lstStyle/>
           <a:p>
-            <a:pPr algn="ctr" indent="0" marL="0">
+            <a:pPr marL="0" indent="0" algn="ctr">
               <a:buNone/>
             </a:pPr>
             <a:r>
@@ -7202,7 +6887,7 @@
           <a:bodyPr wrap="square" lIns="0" tIns="0" rIns="0" bIns="0" rtlCol="0" anchor="ctr"/>
           <a:lstStyle/>
           <a:p>
-            <a:pPr algn="ctr" indent="0" marL="0">
+            <a:pPr marL="0" indent="0" algn="ctr">
               <a:buNone/>
             </a:pPr>
             <a:r>
@@ -7241,7 +6926,7 @@
             <a:prstDash val="solid"/>
           </a:ln>
           <a:effectLst>
-            <a:outerShdw sx="100000" sy="100000" kx="0" ky="0" algn="bl" rotWithShape="0" blurRad="101600" dist="38100" dir="8100000">
+            <a:outerShdw blurRad="101600" dist="38100" dir="8100000" algn="bl" rotWithShape="0">
               <a:srgbClr val="000000">
                 <a:alpha val="18000"/>
               </a:srgbClr>
@@ -7295,7 +6980,7 @@
           <a:bodyPr wrap="square" lIns="0" tIns="0" rIns="0" bIns="0" rtlCol="0" anchor="ctr"/>
           <a:lstStyle/>
           <a:p>
-            <a:pPr algn="ctr" indent="0" marL="0">
+            <a:pPr marL="0" indent="0" algn="ctr">
               <a:buNone/>
             </a:pPr>
             <a:r>
@@ -7331,7 +7016,7 @@
           <a:bodyPr wrap="square" rtlCol="0" anchor="ctr"/>
           <a:lstStyle/>
           <a:p>
-            <a:pPr algn="ctr" indent="0" marL="0">
+            <a:pPr marL="0" indent="0" algn="ctr">
               <a:buNone/>
             </a:pPr>
             <a:r>
@@ -7370,7 +7055,7 @@
           <a:bodyPr wrap="square" rtlCol="0" anchor="ctr"/>
           <a:lstStyle/>
           <a:p>
-            <a:pPr algn="ctr" indent="0" marL="0">
+            <a:pPr marL="0" indent="0" algn="ctr">
               <a:buNone/>
             </a:pPr>
             <a:r>
@@ -7434,7 +7119,7 @@
           <a:bodyPr wrap="square" lIns="0" tIns="0" rIns="0" bIns="0" rtlCol="0" anchor="ctr"/>
           <a:lstStyle/>
           <a:p>
-            <a:pPr algn="ctr" indent="0" marL="0">
+            <a:pPr marL="0" indent="0" algn="ctr">
               <a:buNone/>
             </a:pPr>
             <a:r>
@@ -7473,7 +7158,7 @@
             <a:prstDash val="solid"/>
           </a:ln>
           <a:effectLst>
-            <a:outerShdw sx="100000" sy="100000" kx="0" ky="0" algn="bl" rotWithShape="0" blurRad="101600" dist="38100" dir="8100000">
+            <a:outerShdw blurRad="101600" dist="38100" dir="8100000" algn="bl" rotWithShape="0">
               <a:srgbClr val="000000">
                 <a:alpha val="18000"/>
               </a:srgbClr>
@@ -7527,7 +7212,7 @@
           <a:bodyPr wrap="square" lIns="0" tIns="0" rIns="0" bIns="0" rtlCol="0" anchor="ctr"/>
           <a:lstStyle/>
           <a:p>
-            <a:pPr algn="ctr" indent="0" marL="0">
+            <a:pPr marL="0" indent="0" algn="ctr">
               <a:buNone/>
             </a:pPr>
             <a:r>
@@ -7563,7 +7248,7 @@
           <a:bodyPr wrap="square" rtlCol="0" anchor="ctr"/>
           <a:lstStyle/>
           <a:p>
-            <a:pPr algn="ctr" indent="0" marL="0">
+            <a:pPr marL="0" indent="0" algn="ctr">
               <a:buNone/>
             </a:pPr>
             <a:r>
@@ -7602,7 +7287,7 @@
           <a:bodyPr wrap="square" rtlCol="0" anchor="ctr"/>
           <a:lstStyle/>
           <a:p>
-            <a:pPr algn="ctr" indent="0" marL="0">
+            <a:pPr marL="0" indent="0" algn="ctr">
               <a:buNone/>
             </a:pPr>
             <a:r>
@@ -7666,7 +7351,7 @@
           <a:bodyPr wrap="square" lIns="0" tIns="0" rIns="0" bIns="0" rtlCol="0" anchor="ctr"/>
           <a:lstStyle/>
           <a:p>
-            <a:pPr algn="ctr" indent="0" marL="0">
+            <a:pPr marL="0" indent="0" algn="ctr">
               <a:buNone/>
             </a:pPr>
             <a:r>
@@ -7705,7 +7390,7 @@
             <a:prstDash val="solid"/>
           </a:ln>
           <a:effectLst>
-            <a:outerShdw sx="100000" sy="100000" kx="0" ky="0" algn="bl" rotWithShape="0" blurRad="101600" dist="38100" dir="8100000">
+            <a:outerShdw blurRad="101600" dist="38100" dir="8100000" algn="bl" rotWithShape="0">
               <a:srgbClr val="000000">
                 <a:alpha val="18000"/>
               </a:srgbClr>
@@ -7759,7 +7444,7 @@
           <a:bodyPr wrap="square" lIns="0" tIns="0" rIns="0" bIns="0" rtlCol="0" anchor="ctr"/>
           <a:lstStyle/>
           <a:p>
-            <a:pPr algn="ctr" indent="0" marL="0">
+            <a:pPr marL="0" indent="0" algn="ctr">
               <a:buNone/>
             </a:pPr>
             <a:r>
@@ -7795,7 +7480,7 @@
           <a:bodyPr wrap="square" rtlCol="0" anchor="ctr"/>
           <a:lstStyle/>
           <a:p>
-            <a:pPr algn="ctr" indent="0" marL="0">
+            <a:pPr marL="0" indent="0" algn="ctr">
               <a:buNone/>
             </a:pPr>
             <a:r>
@@ -7834,7 +7519,7 @@
           <a:bodyPr wrap="square" rtlCol="0" anchor="ctr"/>
           <a:lstStyle/>
           <a:p>
-            <a:pPr algn="ctr" indent="0" marL="0">
+            <a:pPr marL="0" indent="0" algn="ctr">
               <a:buNone/>
             </a:pPr>
             <a:r>
@@ -7898,7 +7583,7 @@
           <a:bodyPr wrap="square" lIns="0" tIns="0" rIns="0" bIns="0" rtlCol="0" anchor="ctr"/>
           <a:lstStyle/>
           <a:p>
-            <a:pPr algn="ctr" indent="0" marL="0">
+            <a:pPr marL="0" indent="0" algn="ctr">
               <a:buNone/>
             </a:pPr>
             <a:r>
@@ -7937,7 +7622,7 @@
             <a:prstDash val="solid"/>
           </a:ln>
           <a:effectLst>
-            <a:outerShdw sx="100000" sy="100000" kx="0" ky="0" algn="bl" rotWithShape="0" blurRad="101600" dist="38100" dir="8100000">
+            <a:outerShdw blurRad="101600" dist="38100" dir="8100000" algn="bl" rotWithShape="0">
               <a:srgbClr val="000000">
                 <a:alpha val="18000"/>
               </a:srgbClr>
@@ -7991,7 +7676,7 @@
           <a:bodyPr wrap="square" lIns="0" tIns="0" rIns="0" bIns="0" rtlCol="0" anchor="ctr"/>
           <a:lstStyle/>
           <a:p>
-            <a:pPr algn="ctr" indent="0" marL="0">
+            <a:pPr marL="0" indent="0" algn="ctr">
               <a:buNone/>
             </a:pPr>
             <a:r>
@@ -8027,7 +7712,7 @@
           <a:bodyPr wrap="square" rtlCol="0" anchor="ctr"/>
           <a:lstStyle/>
           <a:p>
-            <a:pPr algn="ctr" indent="0" marL="0">
+            <a:pPr marL="0" indent="0" algn="ctr">
               <a:buNone/>
             </a:pPr>
             <a:r>
@@ -8066,7 +7751,7 @@
           <a:bodyPr wrap="square" rtlCol="0" anchor="ctr"/>
           <a:lstStyle/>
           <a:p>
-            <a:pPr algn="ctr" indent="0" marL="0">
+            <a:pPr marL="0" indent="0" algn="ctr">
               <a:buNone/>
             </a:pPr>
             <a:r>
@@ -8134,7 +7819,7 @@
           <a:bodyPr wrap="square" rtlCol="0" anchor="ctr"/>
           <a:lstStyle/>
           <a:p>
-            <a:pPr algn="ctr" indent="0" marL="0">
+            <a:pPr marL="0" indent="0" algn="ctr">
               <a:buNone/>
             </a:pPr>
             <a:r>
@@ -8173,7 +7858,7 @@
           <a:bodyPr wrap="square" rtlCol="0" anchor="ctr"/>
           <a:lstStyle/>
           <a:p>
-            <a:pPr indent="0" marL="0">
+            <a:pPr marL="0" indent="0">
               <a:buNone/>
             </a:pPr>
             <a:r>
@@ -8262,7 +7947,7 @@
           <a:bodyPr wrap="square" rtlCol="0" anchor="ctr"/>
           <a:lstStyle/>
           <a:p>
-            <a:pPr indent="0" marL="0">
+            <a:pPr marL="0" indent="0">
               <a:buNone/>
             </a:pPr>
             <a:r>
@@ -8301,7 +7986,7 @@
           <a:bodyPr wrap="square" rtlCol="0" anchor="ctr"/>
           <a:lstStyle/>
           <a:p>
-            <a:pPr indent="0" marL="0">
+            <a:pPr marL="0" indent="0">
               <a:buNone/>
             </a:pPr>
             <a:r>
@@ -8390,7 +8075,7 @@
           <a:bodyPr wrap="square" rtlCol="0" anchor="ctr"/>
           <a:lstStyle/>
           <a:p>
-            <a:pPr indent="0" marL="0">
+            <a:pPr marL="0" indent="0">
               <a:buNone/>
             </a:pPr>
             <a:r>
@@ -8429,7 +8114,7 @@
           <a:bodyPr wrap="square" rtlCol="0" anchor="ctr"/>
           <a:lstStyle/>
           <a:p>
-            <a:pPr indent="0" marL="0">
+            <a:pPr marL="0" indent="0">
               <a:buNone/>
             </a:pPr>
             <a:r>
@@ -8518,7 +8203,7 @@
           <a:bodyPr wrap="square" rtlCol="0" anchor="ctr"/>
           <a:lstStyle/>
           <a:p>
-            <a:pPr indent="0" marL="0">
+            <a:pPr marL="0" indent="0">
               <a:buNone/>
             </a:pPr>
             <a:r>
@@ -8557,7 +8242,7 @@
           <a:bodyPr wrap="square" rtlCol="0" anchor="ctr"/>
           <a:lstStyle/>
           <a:p>
-            <a:pPr indent="0" marL="0">
+            <a:pPr marL="0" indent="0">
               <a:buNone/>
             </a:pPr>
             <a:r>
@@ -8646,7 +8331,7 @@
           <a:bodyPr wrap="square" rtlCol="0" anchor="ctr"/>
           <a:lstStyle/>
           <a:p>
-            <a:pPr indent="0" marL="0">
+            <a:pPr marL="0" indent="0">
               <a:buNone/>
             </a:pPr>
             <a:r>
@@ -8685,7 +8370,7 @@
           <a:bodyPr wrap="square" rtlCol="0" anchor="ctr"/>
           <a:lstStyle/>
           <a:p>
-            <a:pPr indent="0" marL="0">
+            <a:pPr marL="0" indent="0">
               <a:buNone/>
             </a:pPr>
             <a:r>
@@ -8719,6 +8404,7 @@
         <a:solidFill>
           <a:srgbClr val="0A1628"/>
         </a:solidFill>
+        <a:effectLst/>
       </p:bgPr>
     </p:bg>
     <p:spTree>
@@ -8806,7 +8492,7 @@
           <a:bodyPr wrap="square" rtlCol="0" anchor="ctr"/>
           <a:lstStyle/>
           <a:p>
-            <a:pPr indent="0" marL="0">
+            <a:pPr marL="0" indent="0">
               <a:buNone/>
             </a:pPr>
             <a:r>
@@ -8845,7 +8531,7 @@
           <a:bodyPr wrap="square" rtlCol="0" anchor="ctr"/>
           <a:lstStyle/>
           <a:p>
-            <a:pPr algn="r" indent="0" marL="0">
+            <a:pPr marL="0" indent="0" algn="r">
               <a:buNone/>
             </a:pPr>
             <a:r>
@@ -8884,7 +8570,7 @@
             <a:prstDash val="solid"/>
           </a:ln>
           <a:effectLst>
-            <a:outerShdw sx="100000" sy="100000" kx="0" ky="0" algn="bl" rotWithShape="0" blurRad="101600" dist="38100" dir="8100000">
+            <a:outerShdw blurRad="101600" dist="38100" dir="8100000" algn="bl" rotWithShape="0">
               <a:srgbClr val="000000">
                 <a:alpha val="18000"/>
               </a:srgbClr>
@@ -8913,7 +8599,7 @@
           <a:bodyPr wrap="square" lIns="0" tIns="0" rIns="0" bIns="0" rtlCol="0" anchor="ctr"/>
           <a:lstStyle/>
           <a:p>
-            <a:pPr algn="ctr" indent="0" marL="0">
+            <a:pPr marL="0" indent="0" algn="ctr">
               <a:buNone/>
             </a:pPr>
             <a:r>
@@ -8949,7 +8635,7 @@
           <a:bodyPr wrap="square" rtlCol="0" anchor="ctr"/>
           <a:lstStyle/>
           <a:p>
-            <a:pPr algn="ctr" indent="0" marL="0">
+            <a:pPr marL="0" indent="0" algn="ctr">
               <a:buNone/>
             </a:pPr>
             <a:r>
@@ -8966,7 +8652,7 @@
             <a:endParaRPr lang="en-US" sz="950" dirty="0"/>
           </a:p>
           <a:p>
-            <a:pPr algn="ctr" indent="0" marL="0">
+            <a:pPr marL="0" indent="0" algn="ctr">
               <a:buNone/>
             </a:pPr>
             <a:r>
@@ -9005,7 +8691,7 @@
           <a:bodyPr wrap="square" lIns="0" tIns="0" rIns="0" bIns="0" rtlCol="0" anchor="ctr"/>
           <a:lstStyle/>
           <a:p>
-            <a:pPr algn="ctr" indent="0" marL="0">
+            <a:pPr marL="0" indent="0" algn="ctr">
               <a:buNone/>
             </a:pPr>
             <a:r>
@@ -9044,7 +8730,7 @@
             <a:prstDash val="solid"/>
           </a:ln>
           <a:effectLst>
-            <a:outerShdw sx="100000" sy="100000" kx="0" ky="0" algn="bl" rotWithShape="0" blurRad="101600" dist="38100" dir="8100000">
+            <a:outerShdw blurRad="101600" dist="38100" dir="8100000" algn="bl" rotWithShape="0">
               <a:srgbClr val="000000">
                 <a:alpha val="18000"/>
               </a:srgbClr>
@@ -9073,7 +8759,7 @@
           <a:bodyPr wrap="square" lIns="0" tIns="0" rIns="0" bIns="0" rtlCol="0" anchor="ctr"/>
           <a:lstStyle/>
           <a:p>
-            <a:pPr algn="ctr" indent="0" marL="0">
+            <a:pPr marL="0" indent="0" algn="ctr">
               <a:buNone/>
             </a:pPr>
             <a:r>
@@ -9109,7 +8795,7 @@
           <a:bodyPr wrap="square" rtlCol="0" anchor="ctr"/>
           <a:lstStyle/>
           <a:p>
-            <a:pPr algn="ctr" indent="0" marL="0">
+            <a:pPr marL="0" indent="0" algn="ctr">
               <a:buNone/>
             </a:pPr>
             <a:r>
@@ -9126,7 +8812,7 @@
             <a:endParaRPr lang="en-US" sz="950" dirty="0"/>
           </a:p>
           <a:p>
-            <a:pPr algn="ctr" indent="0" marL="0">
+            <a:pPr marL="0" indent="0" algn="ctr">
               <a:buNone/>
             </a:pPr>
             <a:r>
@@ -9165,7 +8851,7 @@
           <a:bodyPr wrap="square" lIns="0" tIns="0" rIns="0" bIns="0" rtlCol="0" anchor="ctr"/>
           <a:lstStyle/>
           <a:p>
-            <a:pPr algn="ctr" indent="0" marL="0">
+            <a:pPr marL="0" indent="0" algn="ctr">
               <a:buNone/>
             </a:pPr>
             <a:r>
@@ -9204,7 +8890,7 @@
             <a:prstDash val="solid"/>
           </a:ln>
           <a:effectLst>
-            <a:outerShdw sx="100000" sy="100000" kx="0" ky="0" algn="bl" rotWithShape="0" blurRad="101600" dist="38100" dir="8100000">
+            <a:outerShdw blurRad="101600" dist="38100" dir="8100000" algn="bl" rotWithShape="0">
               <a:srgbClr val="000000">
                 <a:alpha val="18000"/>
               </a:srgbClr>
@@ -9233,7 +8919,7 @@
           <a:bodyPr wrap="square" lIns="0" tIns="0" rIns="0" bIns="0" rtlCol="0" anchor="ctr"/>
           <a:lstStyle/>
           <a:p>
-            <a:pPr algn="ctr" indent="0" marL="0">
+            <a:pPr marL="0" indent="0" algn="ctr">
               <a:buNone/>
             </a:pPr>
             <a:r>
@@ -9269,7 +8955,7 @@
           <a:bodyPr wrap="square" rtlCol="0" anchor="ctr"/>
           <a:lstStyle/>
           <a:p>
-            <a:pPr algn="ctr" indent="0" marL="0">
+            <a:pPr marL="0" indent="0" algn="ctr">
               <a:buNone/>
             </a:pPr>
             <a:r>
@@ -9286,7 +8972,7 @@
             <a:endParaRPr lang="en-US" sz="950" dirty="0"/>
           </a:p>
           <a:p>
-            <a:pPr algn="ctr" indent="0" marL="0">
+            <a:pPr marL="0" indent="0" algn="ctr">
               <a:buNone/>
             </a:pPr>
             <a:r>
@@ -9325,7 +9011,7 @@
           <a:bodyPr wrap="square" lIns="0" tIns="0" rIns="0" bIns="0" rtlCol="0" anchor="ctr"/>
           <a:lstStyle/>
           <a:p>
-            <a:pPr algn="ctr" indent="0" marL="0">
+            <a:pPr marL="0" indent="0" algn="ctr">
               <a:buNone/>
             </a:pPr>
             <a:r>
@@ -9364,7 +9050,7 @@
             <a:prstDash val="solid"/>
           </a:ln>
           <a:effectLst>
-            <a:outerShdw sx="100000" sy="100000" kx="0" ky="0" algn="bl" rotWithShape="0" blurRad="101600" dist="38100" dir="8100000">
+            <a:outerShdw blurRad="101600" dist="38100" dir="8100000" algn="bl" rotWithShape="0">
               <a:srgbClr val="000000">
                 <a:alpha val="18000"/>
               </a:srgbClr>
@@ -9393,7 +9079,7 @@
           <a:bodyPr wrap="square" lIns="0" tIns="0" rIns="0" bIns="0" rtlCol="0" anchor="ctr"/>
           <a:lstStyle/>
           <a:p>
-            <a:pPr algn="ctr" indent="0" marL="0">
+            <a:pPr marL="0" indent="0" algn="ctr">
               <a:buNone/>
             </a:pPr>
             <a:r>
@@ -9429,7 +9115,7 @@
           <a:bodyPr wrap="square" rtlCol="0" anchor="ctr"/>
           <a:lstStyle/>
           <a:p>
-            <a:pPr algn="ctr" indent="0" marL="0">
+            <a:pPr marL="0" indent="0" algn="ctr">
               <a:buNone/>
             </a:pPr>
             <a:r>
@@ -9446,7 +9132,7 @@
             <a:endParaRPr lang="en-US" sz="950" dirty="0"/>
           </a:p>
           <a:p>
-            <a:pPr algn="ctr" indent="0" marL="0">
+            <a:pPr marL="0" indent="0" algn="ctr">
               <a:buNone/>
             </a:pPr>
             <a:r>
@@ -9485,7 +9171,7 @@
           <a:bodyPr wrap="square" lIns="0" tIns="0" rIns="0" bIns="0" rtlCol="0" anchor="ctr"/>
           <a:lstStyle/>
           <a:p>
-            <a:pPr algn="ctr" indent="0" marL="0">
+            <a:pPr marL="0" indent="0" algn="ctr">
               <a:buNone/>
             </a:pPr>
             <a:r>
@@ -9524,7 +9210,7 @@
             <a:prstDash val="solid"/>
           </a:ln>
           <a:effectLst>
-            <a:outerShdw sx="100000" sy="100000" kx="0" ky="0" algn="bl" rotWithShape="0" blurRad="101600" dist="38100" dir="8100000">
+            <a:outerShdw blurRad="101600" dist="38100" dir="8100000" algn="bl" rotWithShape="0">
               <a:srgbClr val="000000">
                 <a:alpha val="18000"/>
               </a:srgbClr>
@@ -9553,7 +9239,7 @@
           <a:bodyPr wrap="square" lIns="0" tIns="0" rIns="0" bIns="0" rtlCol="0" anchor="ctr"/>
           <a:lstStyle/>
           <a:p>
-            <a:pPr algn="ctr" indent="0" marL="0">
+            <a:pPr marL="0" indent="0" algn="ctr">
               <a:buNone/>
             </a:pPr>
             <a:r>
@@ -9589,7 +9275,7 @@
           <a:bodyPr wrap="square" rtlCol="0" anchor="ctr"/>
           <a:lstStyle/>
           <a:p>
-            <a:pPr algn="ctr" indent="0" marL="0">
+            <a:pPr marL="0" indent="0" algn="ctr">
               <a:buNone/>
             </a:pPr>
             <a:r>
@@ -9606,7 +9292,7 @@
             <a:endParaRPr lang="en-US" sz="950" dirty="0"/>
           </a:p>
           <a:p>
-            <a:pPr algn="ctr" indent="0" marL="0">
+            <a:pPr marL="0" indent="0" algn="ctr">
               <a:buNone/>
             </a:pPr>
             <a:r>
@@ -9645,7 +9331,7 @@
           <a:bodyPr wrap="square" lIns="0" tIns="0" rIns="0" bIns="0" rtlCol="0" anchor="ctr"/>
           <a:lstStyle/>
           <a:p>
-            <a:pPr algn="ctr" indent="0" marL="0">
+            <a:pPr marL="0" indent="0" algn="ctr">
               <a:buNone/>
             </a:pPr>
             <a:r>
@@ -9684,7 +9370,7 @@
             <a:prstDash val="solid"/>
           </a:ln>
           <a:effectLst>
-            <a:outerShdw sx="100000" sy="100000" kx="0" ky="0" algn="bl" rotWithShape="0" blurRad="101600" dist="38100" dir="8100000">
+            <a:outerShdw blurRad="101600" dist="38100" dir="8100000" algn="bl" rotWithShape="0">
               <a:srgbClr val="000000">
                 <a:alpha val="18000"/>
               </a:srgbClr>
@@ -9713,7 +9399,7 @@
           <a:bodyPr wrap="square" lIns="0" tIns="0" rIns="0" bIns="0" rtlCol="0" anchor="ctr"/>
           <a:lstStyle/>
           <a:p>
-            <a:pPr algn="ctr" indent="0" marL="0">
+            <a:pPr marL="0" indent="0" algn="ctr">
               <a:buNone/>
             </a:pPr>
             <a:r>
@@ -9749,7 +9435,7 @@
           <a:bodyPr wrap="square" rtlCol="0" anchor="ctr"/>
           <a:lstStyle/>
           <a:p>
-            <a:pPr algn="ctr" indent="0" marL="0">
+            <a:pPr marL="0" indent="0" algn="ctr">
               <a:buNone/>
             </a:pPr>
             <a:r>
@@ -9766,7 +9452,7 @@
             <a:endParaRPr lang="en-US" sz="950" dirty="0"/>
           </a:p>
           <a:p>
-            <a:pPr algn="ctr" indent="0" marL="0">
+            <a:pPr marL="0" indent="0" algn="ctr">
               <a:buNone/>
             </a:pPr>
             <a:r>
@@ -9805,7 +9491,7 @@
           <a:bodyPr wrap="square" rtlCol="0" anchor="ctr"/>
           <a:lstStyle/>
           <a:p>
-            <a:pPr indent="0" marL="0">
+            <a:pPr marL="0" indent="0">
               <a:buNone/>
             </a:pPr>
             <a:r>
@@ -9847,7 +9533,7 @@
             <a:prstDash val="solid"/>
           </a:ln>
           <a:effectLst>
-            <a:outerShdw sx="100000" sy="100000" kx="0" ky="0" algn="bl" rotWithShape="0" blurRad="101600" dist="38100" dir="8100000">
+            <a:outerShdw blurRad="101600" dist="38100" dir="8100000" algn="bl" rotWithShape="0">
               <a:srgbClr val="000000">
                 <a:alpha val="18000"/>
               </a:srgbClr>
@@ -9901,7 +9587,7 @@
           <a:bodyPr wrap="square" rtlCol="0" anchor="ctr"/>
           <a:lstStyle/>
           <a:p>
-            <a:pPr algn="ctr" indent="0" marL="0">
+            <a:pPr marL="0" indent="0" algn="ctr">
               <a:buNone/>
             </a:pPr>
             <a:r>
@@ -9940,7 +9626,7 @@
           <a:bodyPr wrap="square" rtlCol="0" anchor="ctr"/>
           <a:lstStyle/>
           <a:p>
-            <a:pPr algn="ctr" indent="0" marL="0">
+            <a:pPr marL="0" indent="0" algn="ctr">
               <a:buNone/>
             </a:pPr>
             <a:r>
@@ -9982,7 +9668,7 @@
             <a:prstDash val="solid"/>
           </a:ln>
           <a:effectLst>
-            <a:outerShdw sx="100000" sy="100000" kx="0" ky="0" algn="bl" rotWithShape="0" blurRad="101600" dist="38100" dir="8100000">
+            <a:outerShdw blurRad="101600" dist="38100" dir="8100000" algn="bl" rotWithShape="0">
               <a:srgbClr val="000000">
                 <a:alpha val="18000"/>
               </a:srgbClr>
@@ -10036,7 +9722,7 @@
           <a:bodyPr wrap="square" rtlCol="0" anchor="ctr"/>
           <a:lstStyle/>
           <a:p>
-            <a:pPr algn="ctr" indent="0" marL="0">
+            <a:pPr marL="0" indent="0" algn="ctr">
               <a:buNone/>
             </a:pPr>
             <a:r>
@@ -10075,7 +9761,7 @@
           <a:bodyPr wrap="square" rtlCol="0" anchor="ctr"/>
           <a:lstStyle/>
           <a:p>
-            <a:pPr algn="ctr" indent="0" marL="0">
+            <a:pPr marL="0" indent="0" algn="ctr">
               <a:buNone/>
             </a:pPr>
             <a:r>
@@ -10117,7 +9803,7 @@
             <a:prstDash val="solid"/>
           </a:ln>
           <a:effectLst>
-            <a:outerShdw sx="100000" sy="100000" kx="0" ky="0" algn="bl" rotWithShape="0" blurRad="101600" dist="38100" dir="8100000">
+            <a:outerShdw blurRad="101600" dist="38100" dir="8100000" algn="bl" rotWithShape="0">
               <a:srgbClr val="000000">
                 <a:alpha val="18000"/>
               </a:srgbClr>
@@ -10171,7 +9857,7 @@
           <a:bodyPr wrap="square" rtlCol="0" anchor="ctr"/>
           <a:lstStyle/>
           <a:p>
-            <a:pPr algn="ctr" indent="0" marL="0">
+            <a:pPr marL="0" indent="0" algn="ctr">
               <a:buNone/>
             </a:pPr>
             <a:r>
@@ -10210,7 +9896,7 @@
           <a:bodyPr wrap="square" rtlCol="0" anchor="ctr"/>
           <a:lstStyle/>
           <a:p>
-            <a:pPr algn="ctr" indent="0" marL="0">
+            <a:pPr marL="0" indent="0" algn="ctr">
               <a:buNone/>
             </a:pPr>
             <a:r>
@@ -10244,6 +9930,7 @@
         <a:solidFill>
           <a:srgbClr val="F8FAFC"/>
         </a:solidFill>
+        <a:effectLst/>
       </p:bgPr>
     </p:bg>
     <p:spTree>
@@ -10331,7 +10018,7 @@
           <a:bodyPr wrap="square" rtlCol="0" anchor="ctr"/>
           <a:lstStyle/>
           <a:p>
-            <a:pPr indent="0" marL="0">
+            <a:pPr marL="0" indent="0">
               <a:buNone/>
             </a:pPr>
             <a:r>
@@ -10370,7 +10057,7 @@
           <a:bodyPr wrap="square" rtlCol="0" anchor="ctr"/>
           <a:lstStyle/>
           <a:p>
-            <a:pPr algn="r" indent="0" marL="0">
+            <a:pPr marL="0" indent="0" algn="r">
               <a:buNone/>
             </a:pPr>
             <a:r>
@@ -10409,7 +10096,7 @@
             <a:prstDash val="solid"/>
           </a:ln>
           <a:effectLst>
-            <a:outerShdw sx="100000" sy="100000" kx="0" ky="0" algn="bl" rotWithShape="0" blurRad="101600" dist="38100" dir="8100000">
+            <a:outerShdw blurRad="101600" dist="38100" dir="8100000" algn="bl" rotWithShape="0">
               <a:srgbClr val="000000">
                 <a:alpha val="18000"/>
               </a:srgbClr>
@@ -10463,7 +10150,7 @@
           <a:bodyPr wrap="square" rtlCol="0" anchor="ctr"/>
           <a:lstStyle/>
           <a:p>
-            <a:pPr indent="0" marL="0">
+            <a:pPr marL="0" indent="0">
               <a:buNone/>
             </a:pPr>
             <a:r>
@@ -10502,7 +10189,7 @@
           <a:bodyPr wrap="square" rtlCol="0" anchor="ctr"/>
           <a:lstStyle/>
           <a:p>
-            <a:pPr indent="0" marL="0">
+            <a:pPr marL="0" indent="0">
               <a:buNone/>
             </a:pPr>
             <a:r>
@@ -10516,9 +10203,6 @@
               </a:rPr>
               <a:t>✔  </a:t>
             </a:r>
-            <a:pPr indent="0" marL="0">
-              <a:buNone/>
-            </a:pPr>
             <a:r>
               <a:rPr lang="en-US" sz="1050" dirty="0">
                 <a:solidFill>
@@ -10555,7 +10239,7 @@
           <a:bodyPr wrap="square" rtlCol="0" anchor="ctr"/>
           <a:lstStyle/>
           <a:p>
-            <a:pPr indent="0" marL="0">
+            <a:pPr marL="0" indent="0">
               <a:buNone/>
             </a:pPr>
             <a:r>
@@ -10569,9 +10253,6 @@
               </a:rPr>
               <a:t>✔  </a:t>
             </a:r>
-            <a:pPr indent="0" marL="0">
-              <a:buNone/>
-            </a:pPr>
             <a:r>
               <a:rPr lang="en-US" sz="1050" dirty="0">
                 <a:solidFill>
@@ -10608,7 +10289,7 @@
           <a:bodyPr wrap="square" rtlCol="0" anchor="ctr"/>
           <a:lstStyle/>
           <a:p>
-            <a:pPr indent="0" marL="0">
+            <a:pPr marL="0" indent="0">
               <a:buNone/>
             </a:pPr>
             <a:r>
@@ -10622,9 +10303,6 @@
               </a:rPr>
               <a:t>✔  </a:t>
             </a:r>
-            <a:pPr indent="0" marL="0">
-              <a:buNone/>
-            </a:pPr>
             <a:r>
               <a:rPr lang="en-US" sz="1050" dirty="0">
                 <a:solidFill>
@@ -10661,7 +10339,7 @@
           <a:bodyPr wrap="square" rtlCol="0" anchor="ctr"/>
           <a:lstStyle/>
           <a:p>
-            <a:pPr indent="0" marL="0">
+            <a:pPr marL="0" indent="0">
               <a:buNone/>
             </a:pPr>
             <a:r>
@@ -10675,9 +10353,6 @@
               </a:rPr>
               <a:t>✔  </a:t>
             </a:r>
-            <a:pPr indent="0" marL="0">
-              <a:buNone/>
-            </a:pPr>
             <a:r>
               <a:rPr lang="en-US" sz="1050" dirty="0">
                 <a:solidFill>
@@ -10714,7 +10389,7 @@
           <a:bodyPr wrap="square" rtlCol="0" anchor="ctr"/>
           <a:lstStyle/>
           <a:p>
-            <a:pPr indent="0" marL="0">
+            <a:pPr marL="0" indent="0">
               <a:buNone/>
             </a:pPr>
             <a:r>
@@ -10728,9 +10403,6 @@
               </a:rPr>
               <a:t>✔  </a:t>
             </a:r>
-            <a:pPr indent="0" marL="0">
-              <a:buNone/>
-            </a:pPr>
             <a:r>
               <a:rPr lang="en-US" sz="1050" dirty="0">
                 <a:solidFill>
@@ -10767,7 +10439,7 @@
           <a:bodyPr wrap="square" rtlCol="0" anchor="ctr"/>
           <a:lstStyle/>
           <a:p>
-            <a:pPr indent="0" marL="0">
+            <a:pPr marL="0" indent="0">
               <a:buNone/>
             </a:pPr>
             <a:r>
@@ -10781,9 +10453,6 @@
               </a:rPr>
               <a:t>✔  </a:t>
             </a:r>
-            <a:pPr indent="0" marL="0">
-              <a:buNone/>
-            </a:pPr>
             <a:r>
               <a:rPr lang="en-US" sz="1050" dirty="0">
                 <a:solidFill>
@@ -10820,7 +10489,7 @@
           <a:bodyPr wrap="square" rtlCol="0" anchor="ctr"/>
           <a:lstStyle/>
           <a:p>
-            <a:pPr indent="0" marL="0">
+            <a:pPr marL="0" indent="0">
               <a:buNone/>
             </a:pPr>
             <a:r>
@@ -10834,9 +10503,6 @@
               </a:rPr>
               <a:t>✔  </a:t>
             </a:r>
-            <a:pPr indent="0" marL="0">
-              <a:buNone/>
-            </a:pPr>
             <a:r>
               <a:rPr lang="en-US" sz="1050" dirty="0">
                 <a:solidFill>
@@ -10873,7 +10539,7 @@
           <a:bodyPr wrap="square" rtlCol="0" anchor="ctr"/>
           <a:lstStyle/>
           <a:p>
-            <a:pPr indent="0" marL="0">
+            <a:pPr marL="0" indent="0">
               <a:buNone/>
             </a:pPr>
             <a:r>
@@ -10887,9 +10553,6 @@
               </a:rPr>
               <a:t>✔  </a:t>
             </a:r>
-            <a:pPr indent="0" marL="0">
-              <a:buNone/>
-            </a:pPr>
             <a:r>
               <a:rPr lang="en-US" sz="1050" dirty="0">
                 <a:solidFill>
@@ -10929,7 +10592,7 @@
             <a:prstDash val="solid"/>
           </a:ln>
           <a:effectLst>
-            <a:outerShdw sx="100000" sy="100000" kx="0" ky="0" algn="bl" rotWithShape="0" blurRad="101600" dist="38100" dir="8100000">
+            <a:outerShdw blurRad="101600" dist="38100" dir="8100000" algn="bl" rotWithShape="0">
               <a:srgbClr val="000000">
                 <a:alpha val="18000"/>
               </a:srgbClr>
@@ -10983,7 +10646,7 @@
           <a:bodyPr wrap="square" rtlCol="0" anchor="ctr"/>
           <a:lstStyle/>
           <a:p>
-            <a:pPr indent="0" marL="0">
+            <a:pPr marL="0" indent="0">
               <a:buNone/>
             </a:pPr>
             <a:r>
@@ -11022,7 +10685,7 @@
           <a:bodyPr wrap="square" rtlCol="0" anchor="ctr"/>
           <a:lstStyle/>
           <a:p>
-            <a:pPr indent="0" marL="0">
+            <a:pPr marL="0" indent="0">
               <a:buNone/>
             </a:pPr>
             <a:r>
@@ -11036,9 +10699,6 @@
               </a:rPr>
               <a:t>User: </a:t>
             </a:r>
-            <a:pPr indent="0" marL="0">
-              <a:buNone/>
-            </a:pPr>
             <a:r>
               <a:rPr lang="en-US" sz="1000" dirty="0">
                 <a:solidFill>
@@ -11075,7 +10735,7 @@
           <a:bodyPr wrap="square" rtlCol="0" anchor="ctr"/>
           <a:lstStyle/>
           <a:p>
-            <a:pPr indent="0" marL="0">
+            <a:pPr marL="0" indent="0">
               <a:buNone/>
             </a:pPr>
             <a:r>
@@ -11089,9 +10749,6 @@
               </a:rPr>
               <a:t>Appointment: </a:t>
             </a:r>
-            <a:pPr indent="0" marL="0">
-              <a:buNone/>
-            </a:pPr>
             <a:r>
               <a:rPr lang="en-US" sz="1000" dirty="0">
                 <a:solidFill>
@@ -11128,7 +10785,7 @@
           <a:bodyPr wrap="square" rtlCol="0" anchor="ctr"/>
           <a:lstStyle/>
           <a:p>
-            <a:pPr indent="0" marL="0">
+            <a:pPr marL="0" indent="0">
               <a:buNone/>
             </a:pPr>
             <a:r>
@@ -11142,9 +10799,6 @@
               </a:rPr>
               <a:t>Payment: </a:t>
             </a:r>
-            <a:pPr indent="0" marL="0">
-              <a:buNone/>
-            </a:pPr>
             <a:r>
               <a:rPr lang="en-US" sz="1000" dirty="0">
                 <a:solidFill>
@@ -11181,7 +10835,7 @@
           <a:bodyPr wrap="square" rtlCol="0" anchor="ctr"/>
           <a:lstStyle/>
           <a:p>
-            <a:pPr indent="0" marL="0">
+            <a:pPr marL="0" indent="0">
               <a:buNone/>
             </a:pPr>
             <a:r>
@@ -11195,9 +10849,6 @@
               </a:rPr>
               <a:t>Prescription: </a:t>
             </a:r>
-            <a:pPr indent="0" marL="0">
-              <a:buNone/>
-            </a:pPr>
             <a:r>
               <a:rPr lang="en-US" sz="1000" dirty="0">
                 <a:solidFill>
@@ -11237,7 +10888,7 @@
             <a:prstDash val="solid"/>
           </a:ln>
           <a:effectLst>
-            <a:outerShdw sx="100000" sy="100000" kx="0" ky="0" algn="bl" rotWithShape="0" blurRad="101600" dist="38100" dir="8100000">
+            <a:outerShdw blurRad="101600" dist="38100" dir="8100000" algn="bl" rotWithShape="0">
               <a:srgbClr val="000000">
                 <a:alpha val="18000"/>
               </a:srgbClr>
@@ -11291,7 +10942,7 @@
           <a:bodyPr wrap="square" rtlCol="0" anchor="ctr"/>
           <a:lstStyle/>
           <a:p>
-            <a:pPr indent="0" marL="0">
+            <a:pPr marL="0" indent="0">
               <a:buNone/>
             </a:pPr>
             <a:r>
@@ -11330,7 +10981,7 @@
           <a:bodyPr wrap="square" rtlCol="0" anchor="ctr"/>
           <a:lstStyle/>
           <a:p>
-            <a:pPr indent="0" marL="0">
+            <a:pPr marL="0" indent="0">
               <a:buNone/>
             </a:pPr>
             <a:r>
@@ -11369,7 +11020,7 @@
           <a:bodyPr wrap="square" rtlCol="0" anchor="ctr"/>
           <a:lstStyle/>
           <a:p>
-            <a:pPr indent="0" marL="0">
+            <a:pPr marL="0" indent="0">
               <a:buNone/>
             </a:pPr>
             <a:r>
@@ -11408,7 +11059,7 @@
           <a:bodyPr wrap="square" rtlCol="0" anchor="ctr"/>
           <a:lstStyle/>
           <a:p>
-            <a:pPr indent="0" marL="0">
+            <a:pPr marL="0" indent="0">
               <a:buNone/>
             </a:pPr>
             <a:r>
@@ -11447,7 +11098,7 @@
           <a:bodyPr wrap="square" rtlCol="0" anchor="ctr"/>
           <a:lstStyle/>
           <a:p>
-            <a:pPr indent="0" marL="0">
+            <a:pPr marL="0" indent="0">
               <a:buNone/>
             </a:pPr>
             <a:r>
@@ -11486,7 +11137,7 @@
           <a:bodyPr wrap="square" rtlCol="0" anchor="ctr"/>
           <a:lstStyle/>
           <a:p>
-            <a:pPr indent="0" marL="0">
+            <a:pPr marL="0" indent="0">
               <a:buNone/>
             </a:pPr>
             <a:r>
@@ -11525,7 +11176,7 @@
           <a:bodyPr wrap="square" rtlCol="0" anchor="ctr"/>
           <a:lstStyle/>
           <a:p>
-            <a:pPr indent="0" marL="0">
+            <a:pPr marL="0" indent="0">
               <a:buNone/>
             </a:pPr>
             <a:r>
@@ -11559,6 +11210,7 @@
         <a:solidFill>
           <a:srgbClr val="0A1628"/>
         </a:solidFill>
+        <a:effectLst/>
       </p:bgPr>
     </p:bg>
     <p:spTree>
@@ -11646,7 +11298,7 @@
           <a:bodyPr wrap="square" rtlCol="0" anchor="ctr"/>
           <a:lstStyle/>
           <a:p>
-            <a:pPr indent="0" marL="0">
+            <a:pPr marL="0" indent="0">
               <a:buNone/>
             </a:pPr>
             <a:r>
@@ -11685,7 +11337,7 @@
           <a:bodyPr wrap="square" rtlCol="0" anchor="ctr"/>
           <a:lstStyle/>
           <a:p>
-            <a:pPr algn="r" indent="0" marL="0">
+            <a:pPr marL="0" indent="0" algn="r">
               <a:buNone/>
             </a:pPr>
             <a:r>
@@ -11721,7 +11373,7 @@
           <a:bodyPr wrap="square" rtlCol="0" anchor="ctr"/>
           <a:lstStyle/>
           <a:p>
-            <a:pPr indent="0" marL="0">
+            <a:pPr marL="0" indent="0">
               <a:buNone/>
             </a:pPr>
             <a:r>
@@ -11762,8 +11414,20 @@
             <a:tbl>
               <a:tblPr/>
               <a:tblGrid>
-                <a:gridCol w="4114800"/>
-                <a:gridCol w="4480560"/>
+                <a:gridCol w="4114800">
+                  <a:extLst>
+                    <a:ext uri="{9D8B030D-6E8A-4147-A177-3AD203B41FA5}">
+                      <a16:colId xmlns:a16="http://schemas.microsoft.com/office/drawing/2014/main" val="20000"/>
+                    </a:ext>
+                  </a:extLst>
+                </a:gridCol>
+                <a:gridCol w="4480560">
+                  <a:extLst>
+                    <a:ext uri="{9D8B030D-6E8A-4147-A177-3AD203B41FA5}">
+                      <a16:colId xmlns:a16="http://schemas.microsoft.com/office/drawing/2014/main" val="20001"/>
+                    </a:ext>
+                  </a:extLst>
+                </a:gridCol>
               </a:tblGrid>
               <a:tr h="274320">
                 <a:tc>
@@ -11771,7 +11435,7 @@
                     <a:bodyPr/>
                     <a:lstStyle/>
                     <a:p>
-                      <a:pPr indent="0" marL="0">
+                      <a:pPr marL="0" indent="0">
                         <a:buNone/>
                       </a:pPr>
                       <a:r>
@@ -11792,7 +11456,7 @@
                       </a:endParaRPr>
                     </a:p>
                   </a:txBody>
-                  <a:tcPr marL="91440" marR="91440" marT="45720" marB="45720">
+                  <a:tcPr>
                     <a:lnL w="6350" cap="flat" cmpd="sng" algn="ctr">
                       <a:solidFill>
                         <a:srgbClr val="1E3A5F"/>
@@ -11839,7 +11503,7 @@
                     <a:bodyPr/>
                     <a:lstStyle/>
                     <a:p>
-                      <a:pPr indent="0" marL="0">
+                      <a:pPr marL="0" indent="0">
                         <a:buNone/>
                       </a:pPr>
                       <a:r>
@@ -11860,7 +11524,7 @@
                       </a:endParaRPr>
                     </a:p>
                   </a:txBody>
-                  <a:tcPr marL="91440" marR="91440" marT="45720" marB="45720">
+                  <a:tcPr>
                     <a:lnL w="6350" cap="flat" cmpd="sng" algn="ctr">
                       <a:solidFill>
                         <a:srgbClr val="1E3A5F"/>
@@ -11902,6 +11566,11 @@
                     </a:solidFill>
                   </a:tcPr>
                 </a:tc>
+                <a:extLst>
+                  <a:ext uri="{0D108BD9-81ED-4DB2-BD59-A6C34878D82A}">
+                    <a16:rowId xmlns:a16="http://schemas.microsoft.com/office/drawing/2014/main" val="10000"/>
+                  </a:ext>
+                </a:extLst>
               </a:tr>
               <a:tr h="274320">
                 <a:tc>
@@ -11909,7 +11578,7 @@
                     <a:bodyPr/>
                     <a:lstStyle/>
                     <a:p>
-                      <a:pPr indent="0" marL="0">
+                      <a:pPr marL="0" indent="0">
                         <a:buNone/>
                       </a:pPr>
                       <a:r>
@@ -11930,7 +11599,7 @@
                       </a:endParaRPr>
                     </a:p>
                   </a:txBody>
-                  <a:tcPr marL="91440" marR="91440" marT="45720" marB="45720">
+                  <a:tcPr>
                     <a:lnL w="6350" cap="flat" cmpd="sng" algn="ctr">
                       <a:solidFill>
                         <a:srgbClr val="1E3A5F"/>
@@ -11977,7 +11646,7 @@
                     <a:bodyPr/>
                     <a:lstStyle/>
                     <a:p>
-                      <a:pPr indent="0" marL="0">
+                      <a:pPr marL="0" indent="0">
                         <a:buNone/>
                       </a:pPr>
                       <a:r>
@@ -11998,7 +11667,7 @@
                       </a:endParaRPr>
                     </a:p>
                   </a:txBody>
-                  <a:tcPr marL="91440" marR="91440" marT="45720" marB="45720">
+                  <a:tcPr>
                     <a:lnL w="6350" cap="flat" cmpd="sng" algn="ctr">
                       <a:solidFill>
                         <a:srgbClr val="1E3A5F"/>
@@ -12040,6 +11709,11 @@
                     </a:solidFill>
                   </a:tcPr>
                 </a:tc>
+                <a:extLst>
+                  <a:ext uri="{0D108BD9-81ED-4DB2-BD59-A6C34878D82A}">
+                    <a16:rowId xmlns:a16="http://schemas.microsoft.com/office/drawing/2014/main" val="10001"/>
+                  </a:ext>
+                </a:extLst>
               </a:tr>
               <a:tr h="274320">
                 <a:tc>
@@ -12047,7 +11721,7 @@
                     <a:bodyPr/>
                     <a:lstStyle/>
                     <a:p>
-                      <a:pPr indent="0" marL="0">
+                      <a:pPr marL="0" indent="0">
                         <a:buNone/>
                       </a:pPr>
                       <a:r>
@@ -12068,7 +11742,7 @@
                       </a:endParaRPr>
                     </a:p>
                   </a:txBody>
-                  <a:tcPr marL="91440" marR="91440" marT="45720" marB="45720">
+                  <a:tcPr>
                     <a:lnL w="6350" cap="flat" cmpd="sng" algn="ctr">
                       <a:solidFill>
                         <a:srgbClr val="1E3A5F"/>
@@ -12115,7 +11789,7 @@
                     <a:bodyPr/>
                     <a:lstStyle/>
                     <a:p>
-                      <a:pPr indent="0" marL="0">
+                      <a:pPr marL="0" indent="0">
                         <a:buNone/>
                       </a:pPr>
                       <a:r>
@@ -12136,7 +11810,7 @@
                       </a:endParaRPr>
                     </a:p>
                   </a:txBody>
-                  <a:tcPr marL="91440" marR="91440" marT="45720" marB="45720">
+                  <a:tcPr>
                     <a:lnL w="6350" cap="flat" cmpd="sng" algn="ctr">
                       <a:solidFill>
                         <a:srgbClr val="1E3A5F"/>
@@ -12178,6 +11852,11 @@
                     </a:solidFill>
                   </a:tcPr>
                 </a:tc>
+                <a:extLst>
+                  <a:ext uri="{0D108BD9-81ED-4DB2-BD59-A6C34878D82A}">
+                    <a16:rowId xmlns:a16="http://schemas.microsoft.com/office/drawing/2014/main" val="10002"/>
+                  </a:ext>
+                </a:extLst>
               </a:tr>
               <a:tr h="274320">
                 <a:tc>
@@ -12185,7 +11864,7 @@
                     <a:bodyPr/>
                     <a:lstStyle/>
                     <a:p>
-                      <a:pPr indent="0" marL="0">
+                      <a:pPr marL="0" indent="0">
                         <a:buNone/>
                       </a:pPr>
                       <a:r>
@@ -12206,7 +11885,7 @@
                       </a:endParaRPr>
                     </a:p>
                   </a:txBody>
-                  <a:tcPr marL="91440" marR="91440" marT="45720" marB="45720">
+                  <a:tcPr>
                     <a:lnL w="6350" cap="flat" cmpd="sng" algn="ctr">
                       <a:solidFill>
                         <a:srgbClr val="1E3A5F"/>
@@ -12253,7 +11932,7 @@
                     <a:bodyPr/>
                     <a:lstStyle/>
                     <a:p>
-                      <a:pPr indent="0" marL="0">
+                      <a:pPr marL="0" indent="0">
                         <a:buNone/>
                       </a:pPr>
                       <a:r>
@@ -12274,7 +11953,7 @@
                       </a:endParaRPr>
                     </a:p>
                   </a:txBody>
-                  <a:tcPr marL="91440" marR="91440" marT="45720" marB="45720">
+                  <a:tcPr>
                     <a:lnL w="6350" cap="flat" cmpd="sng" algn="ctr">
                       <a:solidFill>
                         <a:srgbClr val="1E3A5F"/>
@@ -12316,6 +11995,11 @@
                     </a:solidFill>
                   </a:tcPr>
                 </a:tc>
+                <a:extLst>
+                  <a:ext uri="{0D108BD9-81ED-4DB2-BD59-A6C34878D82A}">
+                    <a16:rowId xmlns:a16="http://schemas.microsoft.com/office/drawing/2014/main" val="10003"/>
+                  </a:ext>
+                </a:extLst>
               </a:tr>
               <a:tr h="274320">
                 <a:tc>
@@ -12323,7 +12007,7 @@
                     <a:bodyPr/>
                     <a:lstStyle/>
                     <a:p>
-                      <a:pPr indent="0" marL="0">
+                      <a:pPr marL="0" indent="0">
                         <a:buNone/>
                       </a:pPr>
                       <a:r>
@@ -12344,7 +12028,7 @@
                       </a:endParaRPr>
                     </a:p>
                   </a:txBody>
-                  <a:tcPr marL="91440" marR="91440" marT="45720" marB="45720">
+                  <a:tcPr>
                     <a:lnL w="6350" cap="flat" cmpd="sng" algn="ctr">
                       <a:solidFill>
                         <a:srgbClr val="1E3A5F"/>
@@ -12391,7 +12075,7 @@
                     <a:bodyPr/>
                     <a:lstStyle/>
                     <a:p>
-                      <a:pPr indent="0" marL="0">
+                      <a:pPr marL="0" indent="0">
                         <a:buNone/>
                       </a:pPr>
                       <a:r>
@@ -12412,7 +12096,7 @@
                       </a:endParaRPr>
                     </a:p>
                   </a:txBody>
-                  <a:tcPr marL="91440" marR="91440" marT="45720" marB="45720">
+                  <a:tcPr>
                     <a:lnL w="6350" cap="flat" cmpd="sng" algn="ctr">
                       <a:solidFill>
                         <a:srgbClr val="1E3A5F"/>
@@ -12454,6 +12138,11 @@
                     </a:solidFill>
                   </a:tcPr>
                 </a:tc>
+                <a:extLst>
+                  <a:ext uri="{0D108BD9-81ED-4DB2-BD59-A6C34878D82A}">
+                    <a16:rowId xmlns:a16="http://schemas.microsoft.com/office/drawing/2014/main" val="10004"/>
+                  </a:ext>
+                </a:extLst>
               </a:tr>
             </a:tbl>
           </a:graphicData>
@@ -12480,7 +12169,7 @@
           <a:bodyPr wrap="square" rtlCol="0" anchor="ctr"/>
           <a:lstStyle/>
           <a:p>
-            <a:pPr indent="0" marL="0">
+            <a:pPr marL="0" indent="0">
               <a:buNone/>
             </a:pPr>
             <a:r>
@@ -12519,7 +12208,7 @@
           <a:bodyPr wrap="square" rtlCol="0" anchor="ctr"/>
           <a:lstStyle/>
           <a:p>
-            <a:pPr indent="0" marL="0">
+            <a:pPr marL="0" indent="0">
               <a:buNone/>
             </a:pPr>
             <a:r>
@@ -12533,9 +12222,6 @@
               </a:rPr>
               <a:t>◆  </a:t>
             </a:r>
-            <a:pPr indent="0" marL="0">
-              <a:buNone/>
-            </a:pPr>
             <a:r>
               <a:rPr lang="en-US" sz="1050" dirty="0">
                 <a:solidFill>
@@ -12553,7 +12239,7 @@
       </p:sp>
       <p:sp>
         <p:nvSpPr>
-          <p:cNvPr id="10" name="Text 7"/>
+          <p:cNvPr id="7" name="Text 7"/>
           <p:cNvSpPr/>
           <p:nvPr/>
         </p:nvSpPr>
@@ -12572,7 +12258,7 @@
           <a:bodyPr wrap="square" rtlCol="0" anchor="ctr"/>
           <a:lstStyle/>
           <a:p>
-            <a:pPr indent="0" marL="0">
+            <a:pPr marL="0" indent="0">
               <a:buNone/>
             </a:pPr>
             <a:r>
@@ -12586,9 +12272,6 @@
               </a:rPr>
               <a:t>◆  </a:t>
             </a:r>
-            <a:pPr indent="0" marL="0">
-              <a:buNone/>
-            </a:pPr>
             <a:r>
               <a:rPr lang="en-US" sz="1050" dirty="0">
                 <a:solidFill>
@@ -12625,7 +12308,7 @@
           <a:bodyPr wrap="square" rtlCol="0" anchor="ctr"/>
           <a:lstStyle/>
           <a:p>
-            <a:pPr indent="0" marL="0">
+            <a:pPr marL="0" indent="0">
               <a:buNone/>
             </a:pPr>
             <a:r>
@@ -12639,9 +12322,6 @@
               </a:rPr>
               <a:t>◆  </a:t>
             </a:r>
-            <a:pPr indent="0" marL="0">
-              <a:buNone/>
-            </a:pPr>
             <a:r>
               <a:rPr lang="en-US" sz="1050" dirty="0">
                 <a:solidFill>
@@ -12728,7 +12408,7 @@
           <a:bodyPr wrap="square" rtlCol="0" anchor="ctr"/>
           <a:lstStyle/>
           <a:p>
-            <a:pPr indent="0" marL="0">
+            <a:pPr marL="0" indent="0">
               <a:buNone/>
             </a:pPr>
             <a:r>
@@ -12767,7 +12447,7 @@
           <a:bodyPr wrap="square" rtlCol="0" anchor="ctr"/>
           <a:lstStyle/>
           <a:p>
-            <a:pPr algn="ctr" indent="0" marL="0">
+            <a:pPr marL="0" indent="0" algn="ctr">
               <a:buNone/>
             </a:pPr>
             <a:r>
@@ -13086,4 +12766,299 @@
     </a:ext>
   </a:extLst>
 </a:theme>
+</file>
+
+<file path=ppt/theme/theme2.xml><?xml version="1.0" encoding="utf-8"?>
+<a:theme xmlns:a="http://schemas.openxmlformats.org/drawingml/2006/main" name="Office Theme">
+  <a:themeElements>
+    <a:clrScheme name="Office">
+      <a:dk1>
+        <a:sysClr val="windowText" lastClr="000000"/>
+      </a:dk1>
+      <a:lt1>
+        <a:sysClr val="window" lastClr="FFFFFF"/>
+      </a:lt1>
+      <a:dk2>
+        <a:srgbClr val="44546A"/>
+      </a:dk2>
+      <a:lt2>
+        <a:srgbClr val="E7E6E6"/>
+      </a:lt2>
+      <a:accent1>
+        <a:srgbClr val="4472C4"/>
+      </a:accent1>
+      <a:accent2>
+        <a:srgbClr val="ED7D31"/>
+      </a:accent2>
+      <a:accent3>
+        <a:srgbClr val="A5A5A5"/>
+      </a:accent3>
+      <a:accent4>
+        <a:srgbClr val="FFC000"/>
+      </a:accent4>
+      <a:accent5>
+        <a:srgbClr val="5B9BD5"/>
+      </a:accent5>
+      <a:accent6>
+        <a:srgbClr val="70AD47"/>
+      </a:accent6>
+      <a:hlink>
+        <a:srgbClr val="0563C1"/>
+      </a:hlink>
+      <a:folHlink>
+        <a:srgbClr val="954F72"/>
+      </a:folHlink>
+    </a:clrScheme>
+    <a:fontScheme name="Office">
+      <a:majorFont>
+        <a:latin typeface="Calibri Light" panose="020F0302020204030204"/>
+        <a:ea typeface=""/>
+        <a:cs typeface=""/>
+        <a:font script="Jpan" typeface="游ゴシック Light"/>
+        <a:font script="Hang" typeface="맑은 고딕"/>
+        <a:font script="Hans" typeface="等线 Light"/>
+        <a:font script="Hant" typeface="新細明體"/>
+        <a:font script="Arab" typeface="Times New Roman"/>
+        <a:font script="Hebr" typeface="Times New Roman"/>
+        <a:font script="Thai" typeface="Angsana New"/>
+        <a:font script="Ethi" typeface="Nyala"/>
+        <a:font script="Beng" typeface="Vrinda"/>
+        <a:font script="Gujr" typeface="Shruti"/>
+        <a:font script="Khmr" typeface="MoolBoran"/>
+        <a:font script="Knda" typeface="Tunga"/>
+        <a:font script="Guru" typeface="Raavi"/>
+        <a:font script="Cans" typeface="Euphemia"/>
+        <a:font script="Cher" typeface="Plantagenet Cherokee"/>
+        <a:font script="Yiii" typeface="Microsoft Yi Baiti"/>
+        <a:font script="Tibt" typeface="Microsoft Himalaya"/>
+        <a:font script="Thaa" typeface="MV Boli"/>
+        <a:font script="Deva" typeface="Mangal"/>
+        <a:font script="Telu" typeface="Gautami"/>
+        <a:font script="Taml" typeface="Latha"/>
+        <a:font script="Syrc" typeface="Estrangelo Edessa"/>
+        <a:font script="Orya" typeface="Kalinga"/>
+        <a:font script="Mlym" typeface="Kartika"/>
+        <a:font script="Laoo" typeface="DokChampa"/>
+        <a:font script="Sinh" typeface="Iskoola Pota"/>
+        <a:font script="Mong" typeface="Mongolian Baiti"/>
+        <a:font script="Viet" typeface="Times New Roman"/>
+        <a:font script="Uigh" typeface="Microsoft Uighur"/>
+        <a:font script="Geor" typeface="Sylfaen"/>
+        <a:font script="Armn" typeface="Arial"/>
+        <a:font script="Bugi" typeface="Leelawadee UI"/>
+        <a:font script="Bopo" typeface="Microsoft JhengHei"/>
+        <a:font script="Java" typeface="Javanese Text"/>
+        <a:font script="Lisu" typeface="Segoe UI"/>
+        <a:font script="Mymr" typeface="Myanmar Text"/>
+        <a:font script="Nkoo" typeface="Ebrima"/>
+        <a:font script="Olck" typeface="Nirmala UI"/>
+        <a:font script="Osma" typeface="Ebrima"/>
+        <a:font script="Phag" typeface="Phagspa"/>
+        <a:font script="Syrn" typeface="Estrangelo Edessa"/>
+        <a:font script="Syrj" typeface="Estrangelo Edessa"/>
+        <a:font script="Syre" typeface="Estrangelo Edessa"/>
+        <a:font script="Sora" typeface="Nirmala UI"/>
+        <a:font script="Tale" typeface="Microsoft Tai Le"/>
+        <a:font script="Talu" typeface="Microsoft New Tai Lue"/>
+        <a:font script="Tfng" typeface="Ebrima"/>
+      </a:majorFont>
+      <a:minorFont>
+        <a:latin typeface="Calibri" panose="020F0502020204030204"/>
+        <a:ea typeface=""/>
+        <a:cs typeface=""/>
+        <a:font script="Jpan" typeface="游ゴシック"/>
+        <a:font script="Hang" typeface="맑은 고딕"/>
+        <a:font script="Hans" typeface="等线"/>
+        <a:font script="Hant" typeface="新細明體"/>
+        <a:font script="Arab" typeface="Arial"/>
+        <a:font script="Hebr" typeface="Arial"/>
+        <a:font script="Thai" typeface="Cordia New"/>
+        <a:font script="Ethi" typeface="Nyala"/>
+        <a:font script="Beng" typeface="Vrinda"/>
+        <a:font script="Gujr" typeface="Shruti"/>
+        <a:font script="Khmr" typeface="DaunPenh"/>
+        <a:font script="Knda" typeface="Tunga"/>
+        <a:font script="Guru" typeface="Raavi"/>
+        <a:font script="Cans" typeface="Euphemia"/>
+        <a:font script="Cher" typeface="Plantagenet Cherokee"/>
+        <a:font script="Yiii" typeface="Microsoft Yi Baiti"/>
+        <a:font script="Tibt" typeface="Microsoft Himalaya"/>
+        <a:font script="Thaa" typeface="MV Boli"/>
+        <a:font script="Deva" typeface="Mangal"/>
+        <a:font script="Telu" typeface="Gautami"/>
+        <a:font script="Taml" typeface="Latha"/>
+        <a:font script="Syrc" typeface="Estrangelo Edessa"/>
+        <a:font script="Orya" typeface="Kalinga"/>
+        <a:font script="Mlym" typeface="Kartika"/>
+        <a:font script="Laoo" typeface="DokChampa"/>
+        <a:font script="Sinh" typeface="Iskoola Pota"/>
+        <a:font script="Mong" typeface="Mongolian Baiti"/>
+        <a:font script="Viet" typeface="Arial"/>
+        <a:font script="Uigh" typeface="Microsoft Uighur"/>
+        <a:font script="Geor" typeface="Sylfaen"/>
+        <a:font script="Armn" typeface="Arial"/>
+        <a:font script="Bugi" typeface="Leelawadee UI"/>
+        <a:font script="Bopo" typeface="Microsoft JhengHei"/>
+        <a:font script="Java" typeface="Javanese Text"/>
+        <a:font script="Lisu" typeface="Segoe UI"/>
+        <a:font script="Mymr" typeface="Myanmar Text"/>
+        <a:font script="Nkoo" typeface="Ebrima"/>
+        <a:font script="Olck" typeface="Nirmala UI"/>
+        <a:font script="Osma" typeface="Ebrima"/>
+        <a:font script="Phag" typeface="Phagspa"/>
+        <a:font script="Syrn" typeface="Estrangelo Edessa"/>
+        <a:font script="Syrj" typeface="Estrangelo Edessa"/>
+        <a:font script="Syre" typeface="Estrangelo Edessa"/>
+        <a:font script="Sora" typeface="Nirmala UI"/>
+        <a:font script="Tale" typeface="Microsoft Tai Le"/>
+        <a:font script="Talu" typeface="Microsoft New Tai Lue"/>
+        <a:font script="Tfng" typeface="Ebrima"/>
+      </a:minorFont>
+    </a:fontScheme>
+    <a:fmtScheme name="Office">
+      <a:fillStyleLst>
+        <a:solidFill>
+          <a:schemeClr val="phClr"/>
+        </a:solidFill>
+        <a:gradFill rotWithShape="1">
+          <a:gsLst>
+            <a:gs pos="0">
+              <a:schemeClr val="phClr">
+                <a:lumMod val="110000"/>
+                <a:satMod val="105000"/>
+                <a:tint val="67000"/>
+              </a:schemeClr>
+            </a:gs>
+            <a:gs pos="50000">
+              <a:schemeClr val="phClr">
+                <a:lumMod val="105000"/>
+                <a:satMod val="103000"/>
+                <a:tint val="73000"/>
+              </a:schemeClr>
+            </a:gs>
+            <a:gs pos="100000">
+              <a:schemeClr val="phClr">
+                <a:lumMod val="105000"/>
+                <a:satMod val="109000"/>
+                <a:tint val="81000"/>
+              </a:schemeClr>
+            </a:gs>
+          </a:gsLst>
+          <a:lin ang="5400000" scaled="0"/>
+        </a:gradFill>
+        <a:gradFill rotWithShape="1">
+          <a:gsLst>
+            <a:gs pos="0">
+              <a:schemeClr val="phClr">
+                <a:satMod val="103000"/>
+                <a:lumMod val="102000"/>
+                <a:tint val="94000"/>
+              </a:schemeClr>
+            </a:gs>
+            <a:gs pos="50000">
+              <a:schemeClr val="phClr">
+                <a:satMod val="110000"/>
+                <a:lumMod val="100000"/>
+                <a:shade val="100000"/>
+              </a:schemeClr>
+            </a:gs>
+            <a:gs pos="100000">
+              <a:schemeClr val="phClr">
+                <a:lumMod val="99000"/>
+                <a:satMod val="120000"/>
+                <a:shade val="78000"/>
+              </a:schemeClr>
+            </a:gs>
+          </a:gsLst>
+          <a:lin ang="5400000" scaled="0"/>
+        </a:gradFill>
+      </a:fillStyleLst>
+      <a:lnStyleLst>
+        <a:ln w="6350" cap="flat" cmpd="sng" algn="ctr">
+          <a:solidFill>
+            <a:schemeClr val="phClr"/>
+          </a:solidFill>
+          <a:prstDash val="solid"/>
+          <a:miter lim="800000"/>
+        </a:ln>
+        <a:ln w="12700" cap="flat" cmpd="sng" algn="ctr">
+          <a:solidFill>
+            <a:schemeClr val="phClr"/>
+          </a:solidFill>
+          <a:prstDash val="solid"/>
+          <a:miter lim="800000"/>
+        </a:ln>
+        <a:ln w="19050" cap="flat" cmpd="sng" algn="ctr">
+          <a:solidFill>
+            <a:schemeClr val="phClr"/>
+          </a:solidFill>
+          <a:prstDash val="solid"/>
+          <a:miter lim="800000"/>
+        </a:ln>
+      </a:lnStyleLst>
+      <a:effectStyleLst>
+        <a:effectStyle>
+          <a:effectLst/>
+        </a:effectStyle>
+        <a:effectStyle>
+          <a:effectLst/>
+        </a:effectStyle>
+        <a:effectStyle>
+          <a:effectLst>
+            <a:outerShdw blurRad="57150" dist="19050" dir="5400000" algn="ctr" rotWithShape="0">
+              <a:srgbClr val="000000">
+                <a:alpha val="63000"/>
+              </a:srgbClr>
+            </a:outerShdw>
+          </a:effectLst>
+        </a:effectStyle>
+      </a:effectStyleLst>
+      <a:bgFillStyleLst>
+        <a:solidFill>
+          <a:schemeClr val="phClr"/>
+        </a:solidFill>
+        <a:solidFill>
+          <a:schemeClr val="phClr">
+            <a:tint val="95000"/>
+            <a:satMod val="170000"/>
+          </a:schemeClr>
+        </a:solidFill>
+        <a:gradFill rotWithShape="1">
+          <a:gsLst>
+            <a:gs pos="0">
+              <a:schemeClr val="phClr">
+                <a:tint val="93000"/>
+                <a:satMod val="150000"/>
+                <a:shade val="98000"/>
+                <a:lumMod val="102000"/>
+              </a:schemeClr>
+            </a:gs>
+            <a:gs pos="50000">
+              <a:schemeClr val="phClr">
+                <a:tint val="98000"/>
+                <a:satMod val="130000"/>
+                <a:shade val="90000"/>
+                <a:lumMod val="103000"/>
+              </a:schemeClr>
+            </a:gs>
+            <a:gs pos="100000">
+              <a:schemeClr val="phClr">
+                <a:shade val="63000"/>
+                <a:satMod val="120000"/>
+              </a:schemeClr>
+            </a:gs>
+          </a:gsLst>
+          <a:lin ang="5400000" scaled="0"/>
+        </a:gradFill>
+      </a:bgFillStyleLst>
+    </a:fmtScheme>
+  </a:themeElements>
+  <a:objectDefaults/>
+  <a:extraClrSchemeLst/>
+  <a:extLst>
+    <a:ext uri="{05A4C25C-085E-4340-85A3-A5531E510DB2}">
+      <thm15:themeFamily xmlns:thm15="http://schemas.microsoft.com/office/thememl/2012/main" name="Office Theme" id="{62F939B6-93AF-4DB8-9C6B-D6C7DFDC589F}" vid="{4A3C46E8-61CC-4603-A589-7422A47A8E4A}"/>
+    </a:ext>
+  </a:extLst>
+</a:theme>
 </file>